--- a/docs/final-defence.pptx
+++ b/docs/final-defence.pptx
@@ -1,34 +1,32 @@
 
 <file path=ppt/presentation.xml><?xml version="1.0" encoding="utf-8"?>
-<p:presentation xmlns:a="http://schemas.openxmlformats.org/drawingml/2006/main" xmlns:r="http://schemas.openxmlformats.org/officeDocument/2006/relationships" xmlns:p="http://schemas.openxmlformats.org/presentationml/2006/main" saveSubsetFonts="1" autoCompressPictures="0">
+<p:presentation xmlns:a="http://schemas.openxmlformats.org/drawingml/2006/main" xmlns:r="http://schemas.openxmlformats.org/officeDocument/2006/relationships" xmlns:p="http://schemas.openxmlformats.org/presentationml/2006/main" xmlns:m="http://schemas.openxmlformats.org/officeDocument/2006/math" xmlns:w="http://schemas.openxmlformats.org/wordprocessingml/2006/main" autoCompressPictures="0" saveSubsetFonts="1">
   <p:sldMasterIdLst>
     <p:sldMasterId id="2147483648" r:id="rId1"/>
   </p:sldMasterIdLst>
+  <p:notesMasterIdLst>
+    <p:notesMasterId r:id="rId16"/>
+  </p:notesMasterIdLst>
   <p:sldIdLst>
-    <p:sldId id="256" r:id="rId2"/>
-    <p:sldId id="257" r:id="rId3"/>
-    <p:sldId id="258" r:id="rId4"/>
-    <p:sldId id="259" r:id="rId5"/>
-    <p:sldId id="260" r:id="rId6"/>
-    <p:sldId id="261" r:id="rId7"/>
-    <p:sldId id="262" r:id="rId8"/>
-    <p:sldId id="263" r:id="rId9"/>
-    <p:sldId id="264" r:id="rId10"/>
-    <p:sldId id="265" r:id="rId11"/>
-    <p:sldId id="266" r:id="rId12"/>
-    <p:sldId id="267" r:id="rId13"/>
-    <p:sldId id="268" r:id="rId14"/>
-    <p:sldId id="269" r:id="rId15"/>
-    <p:sldId id="270" r:id="rId16"/>
+    <p:sldId id="256" r:id="rId3"/>
+    <p:sldId id="257" r:id="rId4"/>
+    <p:sldId id="258" r:id="rId5"/>
+    <p:sldId id="259" r:id="rId6"/>
+    <p:sldId id="260" r:id="rId7"/>
+    <p:sldId id="261" r:id="rId8"/>
+    <p:sldId id="262" r:id="rId9"/>
+    <p:sldId id="263" r:id="rId10"/>
+    <p:sldId id="264" r:id="rId11"/>
+    <p:sldId id="265" r:id="rId12"/>
+    <p:sldId id="266" r:id="rId13"/>
+    <p:sldId id="267" r:id="rId14"/>
+    <p:sldId id="268" r:id="rId15"/>
   </p:sldIdLst>
-  <p:notesMasterIdLst>
-    <p:notesMasterId r:id="rId17"/>
-  </p:notesMasterIdLst>
   <p:sldSz cx="12192000" cy="6858000"/>
   <p:notesSz cx="6858000" cy="12192000"/>
   <p:defaultTextStyle>
-    <a:lvl1pPr marL="0" algn="l" defTabSz="914400" rtl="0" eaLnBrk="1" latinLnBrk="0" hangingPunct="1">
-      <a:defRPr sz="1800" kern="1200">
+    <a:lvl1pPr marL="0" algn="l" defTabSz="914400" rtl="0">
+      <a:defRPr sz="1800">
         <a:solidFill>
           <a:schemeClr val="tx1"/>
         </a:solidFill>
@@ -37,8 +35,8 @@
         <a:cs typeface="+mn-cs"/>
       </a:defRPr>
     </a:lvl1pPr>
-    <a:lvl2pPr marL="457200" algn="l" defTabSz="914400" rtl="0" eaLnBrk="1" latinLnBrk="0" hangingPunct="1">
-      <a:defRPr sz="1800" kern="1200">
+    <a:lvl2pPr marL="457200" algn="l" defTabSz="914400" rtl="0">
+      <a:defRPr sz="1800">
         <a:solidFill>
           <a:schemeClr val="tx1"/>
         </a:solidFill>
@@ -47,8 +45,8 @@
         <a:cs typeface="+mn-cs"/>
       </a:defRPr>
     </a:lvl2pPr>
-    <a:lvl3pPr marL="914400" algn="l" defTabSz="914400" rtl="0" eaLnBrk="1" latinLnBrk="0" hangingPunct="1">
-      <a:defRPr sz="1800" kern="1200">
+    <a:lvl3pPr marL="914400" algn="l" defTabSz="914400" rtl="0">
+      <a:defRPr sz="1800">
         <a:solidFill>
           <a:schemeClr val="tx1"/>
         </a:solidFill>
@@ -57,8 +55,8 @@
         <a:cs typeface="+mn-cs"/>
       </a:defRPr>
     </a:lvl3pPr>
-    <a:lvl4pPr marL="1371600" algn="l" defTabSz="914400" rtl="0" eaLnBrk="1" latinLnBrk="0" hangingPunct="1">
-      <a:defRPr sz="1800" kern="1200">
+    <a:lvl4pPr marL="1371600" algn="l" defTabSz="914400" rtl="0">
+      <a:defRPr sz="1800">
         <a:solidFill>
           <a:schemeClr val="tx1"/>
         </a:solidFill>
@@ -67,8 +65,8 @@
         <a:cs typeface="+mn-cs"/>
       </a:defRPr>
     </a:lvl4pPr>
-    <a:lvl5pPr marL="1828800" algn="l" defTabSz="914400" rtl="0" eaLnBrk="1" latinLnBrk="0" hangingPunct="1">
-      <a:defRPr sz="1800" kern="1200">
+    <a:lvl5pPr marL="1828800" algn="l" defTabSz="914400" rtl="0">
+      <a:defRPr sz="1800">
         <a:solidFill>
           <a:schemeClr val="tx1"/>
         </a:solidFill>
@@ -77,8 +75,8 @@
         <a:cs typeface="+mn-cs"/>
       </a:defRPr>
     </a:lvl5pPr>
-    <a:lvl6pPr marL="2286000" algn="l" defTabSz="914400" rtl="0" eaLnBrk="1" latinLnBrk="0" hangingPunct="1">
-      <a:defRPr sz="1800" kern="1200">
+    <a:lvl6pPr marL="2286000" algn="l" defTabSz="914400" rtl="0">
+      <a:defRPr sz="1800">
         <a:solidFill>
           <a:schemeClr val="tx1"/>
         </a:solidFill>
@@ -87,8 +85,8 @@
         <a:cs typeface="+mn-cs"/>
       </a:defRPr>
     </a:lvl6pPr>
-    <a:lvl7pPr marL="2743200" algn="l" defTabSz="914400" rtl="0" eaLnBrk="1" latinLnBrk="0" hangingPunct="1">
-      <a:defRPr sz="1800" kern="1200">
+    <a:lvl7pPr marL="2743200" algn="l" defTabSz="914400" rtl="0">
+      <a:defRPr sz="1800">
         <a:solidFill>
           <a:schemeClr val="tx1"/>
         </a:solidFill>
@@ -97,8 +95,8 @@
         <a:cs typeface="+mn-cs"/>
       </a:defRPr>
     </a:lvl7pPr>
-    <a:lvl8pPr marL="3200400" algn="l" defTabSz="914400" rtl="0" eaLnBrk="1" latinLnBrk="0" hangingPunct="1">
-      <a:defRPr sz="1800" kern="1200">
+    <a:lvl8pPr marL="3200400" algn="l" defTabSz="914400" rtl="0">
+      <a:defRPr sz="1800">
         <a:solidFill>
           <a:schemeClr val="tx1"/>
         </a:solidFill>
@@ -107,8 +105,8 @@
         <a:cs typeface="+mn-cs"/>
       </a:defRPr>
     </a:lvl8pPr>
-    <a:lvl9pPr marL="3657600" algn="l" defTabSz="914400" rtl="0" eaLnBrk="1" latinLnBrk="0" hangingPunct="1">
-      <a:defRPr sz="1800" kern="1200">
+    <a:lvl9pPr marL="3657600" algn="l" defTabSz="914400" rtl="0">
+      <a:defRPr sz="1800">
         <a:solidFill>
           <a:schemeClr val="tx1"/>
         </a:solidFill>
@@ -123,7 +121,7 @@
 
 <file path=ppt/notesMasters/notesMaster1.xml><?xml version="1.0" encoding="utf-8"?>
 <p:notesMaster xmlns:a="http://schemas.openxmlformats.org/drawingml/2006/main" xmlns:r="http://schemas.openxmlformats.org/officeDocument/2006/relationships" xmlns:p="http://schemas.openxmlformats.org/presentationml/2006/main">
-  <p:cSld>
+  <p:cSld name="">
     <p:bg>
       <p:bgRef idx="1001">
         <a:schemeClr val="bg1"/>
@@ -135,17 +133,17 @@
         <p:cNvGrpSpPr/>
         <p:nvPr/>
       </p:nvGrpSpPr>
-      <p:grpSpPr>
-        <a:xfrm>
-          <a:off x="0" y="0"/>
-          <a:ext cx="0" cy="0"/>
-          <a:chOff x="0" y="0"/>
-          <a:chExt cx="0" cy="0"/>
-        </a:xfrm>
-      </p:grpSpPr>
-      <p:sp>
-        <p:nvSpPr>
-          <p:cNvPr id="2" name="Header Placeholder 1"/>
+      <p:grpSpPr bwMode="auto">
+        <a:xfrm>
+          <a:off x="0" y="0"/>
+          <a:ext cx="0" cy="0"/>
+          <a:chOff x="0" y="0"/>
+          <a:chExt cx="0" cy="0"/>
+        </a:xfrm>
+      </p:grpSpPr>
+      <p:sp>
+        <p:nvSpPr>
+          <p:cNvPr id="509823973" name="Header Placeholder 1"/>
           <p:cNvSpPr>
             <a:spLocks noGrp="1"/>
           </p:cNvSpPr>
@@ -153,7 +151,7 @@
             <p:ph type="hdr" sz="quarter"/>
           </p:nvPr>
         </p:nvSpPr>
-        <p:spPr>
+        <p:spPr bwMode="auto">
           <a:xfrm>
             <a:off x="0" y="0"/>
             <a:ext cx="2971800" cy="458788"/>
@@ -170,13 +168,16 @@
             </a:lvl1pPr>
           </a:lstStyle>
           <a:p>
-            <a:endParaRPr lang="en-US"/>
-          </a:p>
-        </p:txBody>
-      </p:sp>
-      <p:sp>
-        <p:nvSpPr>
-          <p:cNvPr id="3" name="Date Placeholder 2"/>
+            <a:pPr>
+              <a:defRPr/>
+            </a:pPr>
+            <a:endParaRPr lang="en-US"/>
+          </a:p>
+        </p:txBody>
+      </p:sp>
+      <p:sp>
+        <p:nvSpPr>
+          <p:cNvPr id="806457706" name="Date Placeholder 2"/>
           <p:cNvSpPr>
             <a:spLocks noGrp="1"/>
           </p:cNvSpPr>
@@ -184,7 +185,7 @@
             <p:ph type="dt" idx="1"/>
           </p:nvPr>
         </p:nvSpPr>
-        <p:spPr>
+        <p:spPr bwMode="auto">
           <a:xfrm>
             <a:off x="3884613" y="0"/>
             <a:ext cx="2971800" cy="458788"/>
@@ -201,6 +202,9 @@
             </a:lvl1pPr>
           </a:lstStyle>
           <a:p>
+            <a:pPr>
+              <a:defRPr/>
+            </a:pPr>
             <a:fld id="{5282F153-3F37-0F45-9E97-73ACFA13230C}" type="datetimeFigureOut">
               <a:rPr lang="en-US"/>
               <a:t>7/23/19</a:t>
@@ -211,15 +215,15 @@
       </p:sp>
       <p:sp>
         <p:nvSpPr>
-          <p:cNvPr id="4" name="Slide Image Placeholder 3"/>
-          <p:cNvSpPr>
-            <a:spLocks noGrp="1" noRot="1" noChangeAspect="1"/>
+          <p:cNvPr id="1335061127" name="Slide Image Placeholder 3"/>
+          <p:cNvSpPr>
+            <a:spLocks noChangeAspect="1" noGrp="1" noRot="1"/>
           </p:cNvSpPr>
           <p:nvPr>
             <p:ph type="sldImg" idx="2"/>
           </p:nvPr>
         </p:nvSpPr>
-        <p:spPr>
+        <p:spPr bwMode="auto">
           <a:xfrm>
             <a:off x="685800" y="1143000"/>
             <a:ext cx="5486400" cy="3086100"/>
@@ -238,13 +242,16 @@
           <a:bodyPr vert="horz" lIns="91440" tIns="45720" rIns="91440" bIns="45720" rtlCol="0" anchor="ctr"/>
           <a:lstStyle/>
           <a:p>
-            <a:endParaRPr lang="en-US"/>
-          </a:p>
-        </p:txBody>
-      </p:sp>
-      <p:sp>
-        <p:nvSpPr>
-          <p:cNvPr id="5" name="Notes Placeholder 4"/>
+            <a:pPr>
+              <a:defRPr/>
+            </a:pPr>
+            <a:endParaRPr lang="en-US"/>
+          </a:p>
+        </p:txBody>
+      </p:sp>
+      <p:sp>
+        <p:nvSpPr>
+          <p:cNvPr id="562566228" name="Notes Placeholder 4"/>
           <p:cNvSpPr>
             <a:spLocks noGrp="1"/>
           </p:cNvSpPr>
@@ -252,7 +259,7 @@
             <p:ph type="body" sz="quarter" idx="3"/>
           </p:nvPr>
         </p:nvSpPr>
-        <p:spPr>
+        <p:spPr bwMode="auto">
           <a:xfrm>
             <a:off x="685800" y="4400550"/>
             <a:ext cx="5486400" cy="3600450"/>
@@ -265,45 +272,60 @@
           <a:bodyPr vert="horz" lIns="91440" tIns="45720" rIns="91440" bIns="45720" rtlCol="0"/>
           <a:lstStyle/>
           <a:p>
-            <a:pPr lvl="0"/>
+            <a:pPr lvl="0">
+              <a:defRPr/>
+            </a:pPr>
             <a:r>
               <a:rPr lang="en-US"/>
               <a:t>Click to edit Master text styles</a:t>
             </a:r>
-          </a:p>
-          <a:p>
-            <a:pPr lvl="1"/>
+            <a:endParaRPr/>
+          </a:p>
+          <a:p>
+            <a:pPr lvl="1">
+              <a:defRPr/>
+            </a:pPr>
             <a:r>
               <a:rPr lang="en-US"/>
               <a:t>Second level</a:t>
             </a:r>
-          </a:p>
-          <a:p>
-            <a:pPr lvl="2"/>
+            <a:endParaRPr/>
+          </a:p>
+          <a:p>
+            <a:pPr lvl="2">
+              <a:defRPr/>
+            </a:pPr>
             <a:r>
               <a:rPr lang="en-US"/>
               <a:t>Third level</a:t>
             </a:r>
-          </a:p>
-          <a:p>
-            <a:pPr lvl="3"/>
+            <a:endParaRPr/>
+          </a:p>
+          <a:p>
+            <a:pPr lvl="3">
+              <a:defRPr/>
+            </a:pPr>
             <a:r>
               <a:rPr lang="en-US"/>
               <a:t>Fourth level</a:t>
             </a:r>
-          </a:p>
-          <a:p>
-            <a:pPr lvl="4"/>
+            <a:endParaRPr/>
+          </a:p>
+          <a:p>
+            <a:pPr lvl="4">
+              <a:defRPr/>
+            </a:pPr>
             <a:r>
               <a:rPr lang="en-US"/>
               <a:t>Fifth level</a:t>
             </a:r>
-          </a:p>
-        </p:txBody>
-      </p:sp>
-      <p:sp>
-        <p:nvSpPr>
-          <p:cNvPr id="6" name="Footer Placeholder 5"/>
+            <a:endParaRPr/>
+          </a:p>
+        </p:txBody>
+      </p:sp>
+      <p:sp>
+        <p:nvSpPr>
+          <p:cNvPr id="1795202579" name="Footer Placeholder 5"/>
           <p:cNvSpPr>
             <a:spLocks noGrp="1"/>
           </p:cNvSpPr>
@@ -311,7 +333,7 @@
             <p:ph type="ftr" sz="quarter" idx="4"/>
           </p:nvPr>
         </p:nvSpPr>
-        <p:spPr>
+        <p:spPr bwMode="auto">
           <a:xfrm>
             <a:off x="0" y="8685213"/>
             <a:ext cx="2971800" cy="458787"/>
@@ -328,13 +350,16 @@
             </a:lvl1pPr>
           </a:lstStyle>
           <a:p>
-            <a:endParaRPr lang="en-US"/>
-          </a:p>
-        </p:txBody>
-      </p:sp>
-      <p:sp>
-        <p:nvSpPr>
-          <p:cNvPr id="7" name="Slide Number Placeholder 6"/>
+            <a:pPr>
+              <a:defRPr/>
+            </a:pPr>
+            <a:endParaRPr lang="en-US"/>
+          </a:p>
+        </p:txBody>
+      </p:sp>
+      <p:sp>
+        <p:nvSpPr>
+          <p:cNvPr id="813230801" name="Slide Number Placeholder 6"/>
           <p:cNvSpPr>
             <a:spLocks noGrp="1"/>
           </p:cNvSpPr>
@@ -342,7 +367,7 @@
             <p:ph type="sldNum" sz="quarter" idx="5"/>
           </p:nvPr>
         </p:nvSpPr>
-        <p:spPr>
+        <p:spPr bwMode="auto">
           <a:xfrm>
             <a:off x="3884613" y="8685213"/>
             <a:ext cx="2971800" cy="458787"/>
@@ -359,6 +384,9 @@
             </a:lvl1pPr>
           </a:lstStyle>
           <a:p>
+            <a:pPr>
+              <a:defRPr/>
+            </a:pPr>
             <a:fld id="{CE5E9CC1-C706-0F49-92D6-E571CC5EEA8F}" type="slidenum">
               <a:rPr lang="en-US"/>
               <a:t>‹#›</a:t>
@@ -368,16 +396,11 @@
         </p:txBody>
       </p:sp>
     </p:spTree>
-    <p:extLst>
-      <p:ext uri="{BB962C8B-B14F-4D97-AF65-F5344CB8AC3E}">
-        <p14:creationId xmlns:p14="http://schemas.microsoft.com/office/powerpoint/2010/main" val="1024086991"/>
-      </p:ext>
-    </p:extLst>
   </p:cSld>
   <p:clrMap bg1="lt1" tx1="dk1" bg2="lt2" tx2="dk2" accent1="accent1" accent2="accent2" accent3="accent3" accent4="accent4" accent5="accent5" accent6="accent6" hlink="hlink" folHlink="folHlink"/>
   <p:notesStyle>
-    <a:lvl1pPr marL="0" algn="l" defTabSz="914400" rtl="0" eaLnBrk="1" latinLnBrk="0" hangingPunct="1">
-      <a:defRPr sz="1200" kern="1200">
+    <a:lvl1pPr marL="0" algn="l" defTabSz="914400" rtl="0">
+      <a:defRPr sz="1200">
         <a:solidFill>
           <a:schemeClr val="tx1"/>
         </a:solidFill>
@@ -386,8 +409,8 @@
         <a:cs typeface="+mn-cs"/>
       </a:defRPr>
     </a:lvl1pPr>
-    <a:lvl2pPr marL="457200" algn="l" defTabSz="914400" rtl="0" eaLnBrk="1" latinLnBrk="0" hangingPunct="1">
-      <a:defRPr sz="1200" kern="1200">
+    <a:lvl2pPr marL="457200" algn="l" defTabSz="914400" rtl="0">
+      <a:defRPr sz="1200">
         <a:solidFill>
           <a:schemeClr val="tx1"/>
         </a:solidFill>
@@ -396,8 +419,8 @@
         <a:cs typeface="+mn-cs"/>
       </a:defRPr>
     </a:lvl2pPr>
-    <a:lvl3pPr marL="914400" algn="l" defTabSz="914400" rtl="0" eaLnBrk="1" latinLnBrk="0" hangingPunct="1">
-      <a:defRPr sz="1200" kern="1200">
+    <a:lvl3pPr marL="914400" algn="l" defTabSz="914400" rtl="0">
+      <a:defRPr sz="1200">
         <a:solidFill>
           <a:schemeClr val="tx1"/>
         </a:solidFill>
@@ -406,8 +429,8 @@
         <a:cs typeface="+mn-cs"/>
       </a:defRPr>
     </a:lvl3pPr>
-    <a:lvl4pPr marL="1371600" algn="l" defTabSz="914400" rtl="0" eaLnBrk="1" latinLnBrk="0" hangingPunct="1">
-      <a:defRPr sz="1200" kern="1200">
+    <a:lvl4pPr marL="1371600" algn="l" defTabSz="914400" rtl="0">
+      <a:defRPr sz="1200">
         <a:solidFill>
           <a:schemeClr val="tx1"/>
         </a:solidFill>
@@ -416,8 +439,8 @@
         <a:cs typeface="+mn-cs"/>
       </a:defRPr>
     </a:lvl4pPr>
-    <a:lvl5pPr marL="1828800" algn="l" defTabSz="914400" rtl="0" eaLnBrk="1" latinLnBrk="0" hangingPunct="1">
-      <a:defRPr sz="1200" kern="1200">
+    <a:lvl5pPr marL="1828800" algn="l" defTabSz="914400" rtl="0">
+      <a:defRPr sz="1200">
         <a:solidFill>
           <a:schemeClr val="tx1"/>
         </a:solidFill>
@@ -426,8 +449,8 @@
         <a:cs typeface="+mn-cs"/>
       </a:defRPr>
     </a:lvl5pPr>
-    <a:lvl6pPr marL="2286000" algn="l" defTabSz="914400" rtl="0" eaLnBrk="1" latinLnBrk="0" hangingPunct="1">
-      <a:defRPr sz="1200" kern="1200">
+    <a:lvl6pPr marL="2286000" algn="l" defTabSz="914400" rtl="0">
+      <a:defRPr sz="1200">
         <a:solidFill>
           <a:schemeClr val="tx1"/>
         </a:solidFill>
@@ -436,8 +459,8 @@
         <a:cs typeface="+mn-cs"/>
       </a:defRPr>
     </a:lvl6pPr>
-    <a:lvl7pPr marL="2743200" algn="l" defTabSz="914400" rtl="0" eaLnBrk="1" latinLnBrk="0" hangingPunct="1">
-      <a:defRPr sz="1200" kern="1200">
+    <a:lvl7pPr marL="2743200" algn="l" defTabSz="914400" rtl="0">
+      <a:defRPr sz="1200">
         <a:solidFill>
           <a:schemeClr val="tx1"/>
         </a:solidFill>
@@ -446,8 +469,8 @@
         <a:cs typeface="+mn-cs"/>
       </a:defRPr>
     </a:lvl7pPr>
-    <a:lvl8pPr marL="3200400" algn="l" defTabSz="914400" rtl="0" eaLnBrk="1" latinLnBrk="0" hangingPunct="1">
-      <a:defRPr sz="1200" kern="1200">
+    <a:lvl8pPr marL="3200400" algn="l" defTabSz="914400" rtl="0">
+      <a:defRPr sz="1200">
         <a:solidFill>
           <a:schemeClr val="tx1"/>
         </a:solidFill>
@@ -456,8 +479,8 @@
         <a:cs typeface="+mn-cs"/>
       </a:defRPr>
     </a:lvl8pPr>
-    <a:lvl9pPr marL="3657600" algn="l" defTabSz="914400" rtl="0" eaLnBrk="1" latinLnBrk="0" hangingPunct="1">
-      <a:defRPr sz="1200" kern="1200">
+    <a:lvl9pPr marL="3657600" algn="l" defTabSz="914400" rtl="0">
+      <a:defRPr sz="1200">
         <a:solidFill>
           <a:schemeClr val="tx1"/>
         </a:solidFill>
@@ -471,37 +494,37 @@
 </file>
 
 <file path=ppt/notesSlides/notesSlide1.xml><?xml version="1.0" encoding="utf-8"?>
-<p:notes xmlns:a="http://schemas.openxmlformats.org/drawingml/2006/main" xmlns:r="http://schemas.openxmlformats.org/officeDocument/2006/relationships" xmlns:p="http://schemas.openxmlformats.org/presentationml/2006/main">
-  <p:cSld>
-    <p:spTree>
-      <p:nvGrpSpPr>
-        <p:cNvPr id="1" name=""/>
-        <p:cNvGrpSpPr/>
-        <p:nvPr/>
-      </p:nvGrpSpPr>
-      <p:grpSpPr>
-        <a:xfrm>
-          <a:off x="0" y="0"/>
-          <a:ext cx="0" cy="0"/>
-          <a:chOff x="0" y="0"/>
-          <a:chExt cx="0" cy="0"/>
-        </a:xfrm>
-      </p:grpSpPr>
-      <p:sp>
-        <p:nvSpPr>
-          <p:cNvPr id="2" name="Slide Image Placeholder 1"/>
-          <p:cNvSpPr>
-            <a:spLocks noGrp="1" noRot="1" noChangeAspect="1"/>
+<p:notes xmlns:a="http://schemas.openxmlformats.org/drawingml/2006/main" xmlns:r="http://schemas.openxmlformats.org/officeDocument/2006/relationships" xmlns:p="http://schemas.openxmlformats.org/presentationml/2006/main" xmlns:m="http://schemas.openxmlformats.org/officeDocument/2006/math" xmlns:w="http://schemas.openxmlformats.org/wordprocessingml/2006/main">
+  <p:cSld name="">
+    <p:spTree>
+      <p:nvGrpSpPr>
+        <p:cNvPr id="1" name=""/>
+        <p:cNvGrpSpPr/>
+        <p:nvPr/>
+      </p:nvGrpSpPr>
+      <p:grpSpPr bwMode="auto">
+        <a:xfrm>
+          <a:off x="0" y="0"/>
+          <a:ext cx="0" cy="0"/>
+          <a:chOff x="0" y="0"/>
+          <a:chExt cx="0" cy="0"/>
+        </a:xfrm>
+      </p:grpSpPr>
+      <p:sp>
+        <p:nvSpPr>
+          <p:cNvPr id="1830244907" name="Slide Image Placeholder 1"/>
+          <p:cNvSpPr>
+            <a:spLocks noChangeAspect="1" noGrp="1" noRot="1"/>
           </p:cNvSpPr>
           <p:nvPr>
             <p:ph type="sldImg"/>
           </p:nvPr>
         </p:nvSpPr>
-        <p:spPr/>
-      </p:sp>
-      <p:sp>
-        <p:nvSpPr>
-          <p:cNvPr id="3" name="Notes Placeholder 2"/>
+        <p:spPr bwMode="auto"/>
+      </p:sp>
+      <p:sp>
+        <p:nvSpPr>
+          <p:cNvPr id="748346470" name="Notes Placeholder 2"/>
           <p:cNvSpPr>
             <a:spLocks noGrp="1"/>
           </p:cNvSpPr>
@@ -509,22 +532,21 @@
             <p:ph type="body" idx="1"/>
           </p:nvPr>
         </p:nvSpPr>
-        <p:spPr/>
+        <p:spPr bwMode="auto"/>
         <p:txBody>
           <a:bodyPr/>
           <a:lstStyle/>
           <a:p>
-            <a:r>
-              <a:rPr lang="en-US" dirty="0"/>
-              <a:t/>
-            </a:r>
-            <a:endParaRPr lang="en-US" dirty="0"/>
-          </a:p>
-        </p:txBody>
-      </p:sp>
-      <p:sp>
-        <p:nvSpPr>
-          <p:cNvPr id="4" name="Slide Number Placeholder 3"/>
+            <a:pPr>
+              <a:defRPr/>
+            </a:pPr>
+            <a:endParaRPr lang="en-US"/>
+          </a:p>
+        </p:txBody>
+      </p:sp>
+      <p:sp>
+        <p:nvSpPr>
+          <p:cNvPr id="1497412770" name="Slide Number Placeholder 3"/>
           <p:cNvSpPr>
             <a:spLocks noGrp="1"/>
           </p:cNvSpPr>
@@ -532,11 +554,14 @@
             <p:ph type="sldNum" sz="quarter" idx="10"/>
           </p:nvPr>
         </p:nvSpPr>
-        <p:spPr/>
+        <p:spPr bwMode="auto"/>
         <p:txBody>
           <a:bodyPr/>
           <a:lstStyle/>
           <a:p>
+            <a:pPr>
+              <a:defRPr/>
+            </a:pPr>
             <a:fld id="{F7021451-1387-4CA6-816F-3879F97B5CBC}" type="slidenum">
               <a:rPr lang="en-US"/>
               <a:t>1</a:t>
@@ -546,11 +571,6 @@
         </p:txBody>
       </p:sp>
     </p:spTree>
-    <p:extLst>
-      <p:ext uri="{BB962C8B-B14F-4D97-AF65-F5344CB8AC3E}">
-        <p14:creationId xmlns:p14="http://schemas.microsoft.com/office/powerpoint/2010/main" val="1024086991"/>
-      </p:ext>
-    </p:extLst>
   </p:cSld>
   <p:clrMapOvr>
     <a:masterClrMapping/>
@@ -559,37 +579,37 @@
 </file>
 
 <file path=ppt/notesSlides/notesSlide10.xml><?xml version="1.0" encoding="utf-8"?>
-<p:notes xmlns:a="http://schemas.openxmlformats.org/drawingml/2006/main" xmlns:r="http://schemas.openxmlformats.org/officeDocument/2006/relationships" xmlns:p="http://schemas.openxmlformats.org/presentationml/2006/main">
-  <p:cSld>
-    <p:spTree>
-      <p:nvGrpSpPr>
-        <p:cNvPr id="1" name=""/>
-        <p:cNvGrpSpPr/>
-        <p:nvPr/>
-      </p:nvGrpSpPr>
-      <p:grpSpPr>
-        <a:xfrm>
-          <a:off x="0" y="0"/>
-          <a:ext cx="0" cy="0"/>
-          <a:chOff x="0" y="0"/>
-          <a:chExt cx="0" cy="0"/>
-        </a:xfrm>
-      </p:grpSpPr>
-      <p:sp>
-        <p:nvSpPr>
-          <p:cNvPr id="2" name="Slide Image Placeholder 1"/>
-          <p:cNvSpPr>
-            <a:spLocks noGrp="1" noRot="1" noChangeAspect="1"/>
+<p:notes xmlns:a="http://schemas.openxmlformats.org/drawingml/2006/main" xmlns:r="http://schemas.openxmlformats.org/officeDocument/2006/relationships" xmlns:p="http://schemas.openxmlformats.org/presentationml/2006/main" xmlns:m="http://schemas.openxmlformats.org/officeDocument/2006/math" xmlns:w="http://schemas.openxmlformats.org/wordprocessingml/2006/main">
+  <p:cSld name="">
+    <p:spTree>
+      <p:nvGrpSpPr>
+        <p:cNvPr id="1" name=""/>
+        <p:cNvGrpSpPr/>
+        <p:nvPr/>
+      </p:nvGrpSpPr>
+      <p:grpSpPr bwMode="auto">
+        <a:xfrm>
+          <a:off x="0" y="0"/>
+          <a:ext cx="0" cy="0"/>
+          <a:chOff x="0" y="0"/>
+          <a:chExt cx="0" cy="0"/>
+        </a:xfrm>
+      </p:grpSpPr>
+      <p:sp>
+        <p:nvSpPr>
+          <p:cNvPr id="1185029466" name="Slide Image Placeholder 1"/>
+          <p:cNvSpPr>
+            <a:spLocks noChangeAspect="1" noGrp="1" noRot="1"/>
           </p:cNvSpPr>
           <p:nvPr>
             <p:ph type="sldImg"/>
           </p:nvPr>
         </p:nvSpPr>
-        <p:spPr/>
-      </p:sp>
-      <p:sp>
-        <p:nvSpPr>
-          <p:cNvPr id="3" name="Notes Placeholder 2"/>
+        <p:spPr bwMode="auto"/>
+      </p:sp>
+      <p:sp>
+        <p:nvSpPr>
+          <p:cNvPr id="709973259" name="Notes Placeholder 2"/>
           <p:cNvSpPr>
             <a:spLocks noGrp="1"/>
           </p:cNvSpPr>
@@ -597,22 +617,21 @@
             <p:ph type="body" idx="1"/>
           </p:nvPr>
         </p:nvSpPr>
-        <p:spPr/>
+        <p:spPr bwMode="auto"/>
         <p:txBody>
           <a:bodyPr/>
           <a:lstStyle/>
           <a:p>
-            <a:r>
-              <a:rPr lang="en-US" dirty="0"/>
-              <a:t/>
-            </a:r>
-            <a:endParaRPr lang="en-US" dirty="0"/>
-          </a:p>
-        </p:txBody>
-      </p:sp>
-      <p:sp>
-        <p:nvSpPr>
-          <p:cNvPr id="4" name="Slide Number Placeholder 3"/>
+            <a:pPr>
+              <a:defRPr/>
+            </a:pPr>
+            <a:endParaRPr lang="en-US"/>
+          </a:p>
+        </p:txBody>
+      </p:sp>
+      <p:sp>
+        <p:nvSpPr>
+          <p:cNvPr id="1455362209" name="Slide Number Placeholder 3"/>
           <p:cNvSpPr>
             <a:spLocks noGrp="1"/>
           </p:cNvSpPr>
@@ -620,11 +639,14 @@
             <p:ph type="sldNum" sz="quarter" idx="10"/>
           </p:nvPr>
         </p:nvSpPr>
-        <p:spPr/>
+        <p:spPr bwMode="auto"/>
         <p:txBody>
           <a:bodyPr/>
           <a:lstStyle/>
           <a:p>
+            <a:pPr>
+              <a:defRPr/>
+            </a:pPr>
             <a:fld id="{F7021451-1387-4CA6-816F-3879F97B5CBC}" type="slidenum">
               <a:rPr lang="en-US"/>
               <a:t>10</a:t>
@@ -634,11 +656,6 @@
         </p:txBody>
       </p:sp>
     </p:spTree>
-    <p:extLst>
-      <p:ext uri="{BB962C8B-B14F-4D97-AF65-F5344CB8AC3E}">
-        <p14:creationId xmlns:p14="http://schemas.microsoft.com/office/powerpoint/2010/main" val="1024086991"/>
-      </p:ext>
-    </p:extLst>
   </p:cSld>
   <p:clrMapOvr>
     <a:masterClrMapping/>
@@ -647,37 +664,37 @@
 </file>
 
 <file path=ppt/notesSlides/notesSlide11.xml><?xml version="1.0" encoding="utf-8"?>
-<p:notes xmlns:a="http://schemas.openxmlformats.org/drawingml/2006/main" xmlns:r="http://schemas.openxmlformats.org/officeDocument/2006/relationships" xmlns:p="http://schemas.openxmlformats.org/presentationml/2006/main">
-  <p:cSld>
-    <p:spTree>
-      <p:nvGrpSpPr>
-        <p:cNvPr id="1" name=""/>
-        <p:cNvGrpSpPr/>
-        <p:nvPr/>
-      </p:nvGrpSpPr>
-      <p:grpSpPr>
-        <a:xfrm>
-          <a:off x="0" y="0"/>
-          <a:ext cx="0" cy="0"/>
-          <a:chOff x="0" y="0"/>
-          <a:chExt cx="0" cy="0"/>
-        </a:xfrm>
-      </p:grpSpPr>
-      <p:sp>
-        <p:nvSpPr>
-          <p:cNvPr id="2" name="Slide Image Placeholder 1"/>
-          <p:cNvSpPr>
-            <a:spLocks noGrp="1" noRot="1" noChangeAspect="1"/>
+<p:notes xmlns:a="http://schemas.openxmlformats.org/drawingml/2006/main" xmlns:r="http://schemas.openxmlformats.org/officeDocument/2006/relationships" xmlns:p="http://schemas.openxmlformats.org/presentationml/2006/main" xmlns:m="http://schemas.openxmlformats.org/officeDocument/2006/math" xmlns:w="http://schemas.openxmlformats.org/wordprocessingml/2006/main">
+  <p:cSld name="">
+    <p:spTree>
+      <p:nvGrpSpPr>
+        <p:cNvPr id="1" name=""/>
+        <p:cNvGrpSpPr/>
+        <p:nvPr/>
+      </p:nvGrpSpPr>
+      <p:grpSpPr bwMode="auto">
+        <a:xfrm>
+          <a:off x="0" y="0"/>
+          <a:ext cx="0" cy="0"/>
+          <a:chOff x="0" y="0"/>
+          <a:chExt cx="0" cy="0"/>
+        </a:xfrm>
+      </p:grpSpPr>
+      <p:sp>
+        <p:nvSpPr>
+          <p:cNvPr id="1038609462" name="Slide Image Placeholder 1"/>
+          <p:cNvSpPr>
+            <a:spLocks noChangeAspect="1" noGrp="1" noRot="1"/>
           </p:cNvSpPr>
           <p:nvPr>
             <p:ph type="sldImg"/>
           </p:nvPr>
         </p:nvSpPr>
-        <p:spPr/>
-      </p:sp>
-      <p:sp>
-        <p:nvSpPr>
-          <p:cNvPr id="3" name="Notes Placeholder 2"/>
+        <p:spPr bwMode="auto"/>
+      </p:sp>
+      <p:sp>
+        <p:nvSpPr>
+          <p:cNvPr id="1310786408" name="Notes Placeholder 2"/>
           <p:cNvSpPr>
             <a:spLocks noGrp="1"/>
           </p:cNvSpPr>
@@ -685,22 +702,21 @@
             <p:ph type="body" idx="1"/>
           </p:nvPr>
         </p:nvSpPr>
-        <p:spPr/>
+        <p:spPr bwMode="auto"/>
         <p:txBody>
           <a:bodyPr/>
           <a:lstStyle/>
           <a:p>
-            <a:r>
-              <a:rPr lang="en-US" dirty="0"/>
-              <a:t/>
-            </a:r>
-            <a:endParaRPr lang="en-US" dirty="0"/>
-          </a:p>
-        </p:txBody>
-      </p:sp>
-      <p:sp>
-        <p:nvSpPr>
-          <p:cNvPr id="4" name="Slide Number Placeholder 3"/>
+            <a:pPr>
+              <a:defRPr/>
+            </a:pPr>
+            <a:endParaRPr lang="en-US"/>
+          </a:p>
+        </p:txBody>
+      </p:sp>
+      <p:sp>
+        <p:nvSpPr>
+          <p:cNvPr id="638717500" name="Slide Number Placeholder 3"/>
           <p:cNvSpPr>
             <a:spLocks noGrp="1"/>
           </p:cNvSpPr>
@@ -708,11 +724,14 @@
             <p:ph type="sldNum" sz="quarter" idx="10"/>
           </p:nvPr>
         </p:nvSpPr>
-        <p:spPr/>
+        <p:spPr bwMode="auto"/>
         <p:txBody>
           <a:bodyPr/>
           <a:lstStyle/>
           <a:p>
+            <a:pPr>
+              <a:defRPr/>
+            </a:pPr>
             <a:fld id="{F7021451-1387-4CA6-816F-3879F97B5CBC}" type="slidenum">
               <a:rPr lang="en-US"/>
               <a:t>11</a:t>
@@ -722,11 +741,6 @@
         </p:txBody>
       </p:sp>
     </p:spTree>
-    <p:extLst>
-      <p:ext uri="{BB962C8B-B14F-4D97-AF65-F5344CB8AC3E}">
-        <p14:creationId xmlns:p14="http://schemas.microsoft.com/office/powerpoint/2010/main" val="1024086991"/>
-      </p:ext>
-    </p:extLst>
   </p:cSld>
   <p:clrMapOvr>
     <a:masterClrMapping/>
@@ -735,37 +749,37 @@
 </file>
 
 <file path=ppt/notesSlides/notesSlide12.xml><?xml version="1.0" encoding="utf-8"?>
-<p:notes xmlns:a="http://schemas.openxmlformats.org/drawingml/2006/main" xmlns:r="http://schemas.openxmlformats.org/officeDocument/2006/relationships" xmlns:p="http://schemas.openxmlformats.org/presentationml/2006/main">
-  <p:cSld>
-    <p:spTree>
-      <p:nvGrpSpPr>
-        <p:cNvPr id="1" name=""/>
-        <p:cNvGrpSpPr/>
-        <p:nvPr/>
-      </p:nvGrpSpPr>
-      <p:grpSpPr>
-        <a:xfrm>
-          <a:off x="0" y="0"/>
-          <a:ext cx="0" cy="0"/>
-          <a:chOff x="0" y="0"/>
-          <a:chExt cx="0" cy="0"/>
-        </a:xfrm>
-      </p:grpSpPr>
-      <p:sp>
-        <p:nvSpPr>
-          <p:cNvPr id="2" name="Slide Image Placeholder 1"/>
-          <p:cNvSpPr>
-            <a:spLocks noGrp="1" noRot="1" noChangeAspect="1"/>
+<p:notes xmlns:a="http://schemas.openxmlformats.org/drawingml/2006/main" xmlns:r="http://schemas.openxmlformats.org/officeDocument/2006/relationships" xmlns:p="http://schemas.openxmlformats.org/presentationml/2006/main" xmlns:m="http://schemas.openxmlformats.org/officeDocument/2006/math" xmlns:w="http://schemas.openxmlformats.org/wordprocessingml/2006/main">
+  <p:cSld name="">
+    <p:spTree>
+      <p:nvGrpSpPr>
+        <p:cNvPr id="1" name=""/>
+        <p:cNvGrpSpPr/>
+        <p:nvPr/>
+      </p:nvGrpSpPr>
+      <p:grpSpPr bwMode="auto">
+        <a:xfrm>
+          <a:off x="0" y="0"/>
+          <a:ext cx="0" cy="0"/>
+          <a:chOff x="0" y="0"/>
+          <a:chExt cx="0" cy="0"/>
+        </a:xfrm>
+      </p:grpSpPr>
+      <p:sp>
+        <p:nvSpPr>
+          <p:cNvPr id="1501529843" name="Slide Image Placeholder 1"/>
+          <p:cNvSpPr>
+            <a:spLocks noChangeAspect="1" noGrp="1" noRot="1"/>
           </p:cNvSpPr>
           <p:nvPr>
             <p:ph type="sldImg"/>
           </p:nvPr>
         </p:nvSpPr>
-        <p:spPr/>
-      </p:sp>
-      <p:sp>
-        <p:nvSpPr>
-          <p:cNvPr id="3" name="Notes Placeholder 2"/>
+        <p:spPr bwMode="auto"/>
+      </p:sp>
+      <p:sp>
+        <p:nvSpPr>
+          <p:cNvPr id="1527438582" name="Notes Placeholder 2"/>
           <p:cNvSpPr>
             <a:spLocks noGrp="1"/>
           </p:cNvSpPr>
@@ -773,22 +787,21 @@
             <p:ph type="body" idx="1"/>
           </p:nvPr>
         </p:nvSpPr>
-        <p:spPr/>
+        <p:spPr bwMode="auto"/>
         <p:txBody>
           <a:bodyPr/>
           <a:lstStyle/>
           <a:p>
-            <a:r>
-              <a:rPr lang="en-US" dirty="0"/>
-              <a:t/>
-            </a:r>
-            <a:endParaRPr lang="en-US" dirty="0"/>
-          </a:p>
-        </p:txBody>
-      </p:sp>
-      <p:sp>
-        <p:nvSpPr>
-          <p:cNvPr id="4" name="Slide Number Placeholder 3"/>
+            <a:pPr>
+              <a:defRPr/>
+            </a:pPr>
+            <a:endParaRPr lang="en-US"/>
+          </a:p>
+        </p:txBody>
+      </p:sp>
+      <p:sp>
+        <p:nvSpPr>
+          <p:cNvPr id="252982414" name="Slide Number Placeholder 3"/>
           <p:cNvSpPr>
             <a:spLocks noGrp="1"/>
           </p:cNvSpPr>
@@ -796,25 +809,23 @@
             <p:ph type="sldNum" sz="quarter" idx="10"/>
           </p:nvPr>
         </p:nvSpPr>
-        <p:spPr/>
+        <p:spPr bwMode="auto"/>
         <p:txBody>
           <a:bodyPr/>
           <a:lstStyle/>
           <a:p>
+            <a:pPr>
+              <a:defRPr/>
+            </a:pPr>
             <a:fld id="{F7021451-1387-4CA6-816F-3879F97B5CBC}" type="slidenum">
               <a:rPr lang="en-US"/>
-              <a:t>12</a:t>
+              <a:t>13</a:t>
             </a:fld>
             <a:endParaRPr lang="en-US"/>
           </a:p>
         </p:txBody>
       </p:sp>
     </p:spTree>
-    <p:extLst>
-      <p:ext uri="{BB962C8B-B14F-4D97-AF65-F5344CB8AC3E}">
-        <p14:creationId xmlns:p14="http://schemas.microsoft.com/office/powerpoint/2010/main" val="1024086991"/>
-      </p:ext>
-    </p:extLst>
   </p:cSld>
   <p:clrMapOvr>
     <a:masterClrMapping/>
@@ -823,37 +834,37 @@
 </file>
 
 <file path=ppt/notesSlides/notesSlide13.xml><?xml version="1.0" encoding="utf-8"?>
-<p:notes xmlns:a="http://schemas.openxmlformats.org/drawingml/2006/main" xmlns:r="http://schemas.openxmlformats.org/officeDocument/2006/relationships" xmlns:p="http://schemas.openxmlformats.org/presentationml/2006/main">
-  <p:cSld>
-    <p:spTree>
-      <p:nvGrpSpPr>
-        <p:cNvPr id="1" name=""/>
-        <p:cNvGrpSpPr/>
-        <p:nvPr/>
-      </p:nvGrpSpPr>
-      <p:grpSpPr>
-        <a:xfrm>
-          <a:off x="0" y="0"/>
-          <a:ext cx="0" cy="0"/>
-          <a:chOff x="0" y="0"/>
-          <a:chExt cx="0" cy="0"/>
-        </a:xfrm>
-      </p:grpSpPr>
-      <p:sp>
-        <p:nvSpPr>
-          <p:cNvPr id="2" name="Slide Image Placeholder 1"/>
-          <p:cNvSpPr>
-            <a:spLocks noGrp="1" noRot="1" noChangeAspect="1"/>
+<p:notes xmlns:a="http://schemas.openxmlformats.org/drawingml/2006/main" xmlns:r="http://schemas.openxmlformats.org/officeDocument/2006/relationships" xmlns:p="http://schemas.openxmlformats.org/presentationml/2006/main" xmlns:m="http://schemas.openxmlformats.org/officeDocument/2006/math" xmlns:w="http://schemas.openxmlformats.org/wordprocessingml/2006/main">
+  <p:cSld name="">
+    <p:spTree>
+      <p:nvGrpSpPr>
+        <p:cNvPr id="1" name=""/>
+        <p:cNvGrpSpPr/>
+        <p:nvPr/>
+      </p:nvGrpSpPr>
+      <p:grpSpPr bwMode="auto">
+        <a:xfrm>
+          <a:off x="0" y="0"/>
+          <a:ext cx="0" cy="0"/>
+          <a:chOff x="0" y="0"/>
+          <a:chExt cx="0" cy="0"/>
+        </a:xfrm>
+      </p:grpSpPr>
+      <p:sp>
+        <p:nvSpPr>
+          <p:cNvPr id="1393622325" name="Slide Image Placeholder 1"/>
+          <p:cNvSpPr>
+            <a:spLocks noChangeAspect="1" noGrp="1" noRot="1"/>
           </p:cNvSpPr>
           <p:nvPr>
             <p:ph type="sldImg"/>
           </p:nvPr>
         </p:nvSpPr>
-        <p:spPr/>
-      </p:sp>
-      <p:sp>
-        <p:nvSpPr>
-          <p:cNvPr id="3" name="Notes Placeholder 2"/>
+        <p:spPr bwMode="auto"/>
+      </p:sp>
+      <p:sp>
+        <p:nvSpPr>
+          <p:cNvPr id="405233838" name="Notes Placeholder 2"/>
           <p:cNvSpPr>
             <a:spLocks noGrp="1"/>
           </p:cNvSpPr>
@@ -861,22 +872,21 @@
             <p:ph type="body" idx="1"/>
           </p:nvPr>
         </p:nvSpPr>
-        <p:spPr/>
+        <p:spPr bwMode="auto"/>
         <p:txBody>
           <a:bodyPr/>
           <a:lstStyle/>
           <a:p>
-            <a:r>
-              <a:rPr lang="en-US" dirty="0"/>
-              <a:t/>
-            </a:r>
-            <a:endParaRPr lang="en-US" dirty="0"/>
-          </a:p>
-        </p:txBody>
-      </p:sp>
-      <p:sp>
-        <p:nvSpPr>
-          <p:cNvPr id="4" name="Slide Number Placeholder 3"/>
+            <a:pPr>
+              <a:defRPr/>
+            </a:pPr>
+            <a:endParaRPr lang="en-US"/>
+          </a:p>
+        </p:txBody>
+      </p:sp>
+      <p:sp>
+        <p:nvSpPr>
+          <p:cNvPr id="1928744024" name="Slide Number Placeholder 3"/>
           <p:cNvSpPr>
             <a:spLocks noGrp="1"/>
           </p:cNvSpPr>
@@ -884,25 +894,23 @@
             <p:ph type="sldNum" sz="quarter" idx="10"/>
           </p:nvPr>
         </p:nvSpPr>
-        <p:spPr/>
+        <p:spPr bwMode="auto"/>
         <p:txBody>
           <a:bodyPr/>
           <a:lstStyle/>
           <a:p>
+            <a:pPr>
+              <a:defRPr/>
+            </a:pPr>
             <a:fld id="{F7021451-1387-4CA6-816F-3879F97B5CBC}" type="slidenum">
               <a:rPr lang="en-US"/>
-              <a:t>13</a:t>
+              <a:t>14</a:t>
             </a:fld>
             <a:endParaRPr lang="en-US"/>
           </a:p>
         </p:txBody>
       </p:sp>
     </p:spTree>
-    <p:extLst>
-      <p:ext uri="{BB962C8B-B14F-4D97-AF65-F5344CB8AC3E}">
-        <p14:creationId xmlns:p14="http://schemas.microsoft.com/office/powerpoint/2010/main" val="1024086991"/>
-      </p:ext>
-    </p:extLst>
   </p:cSld>
   <p:clrMapOvr>
     <a:masterClrMapping/>
@@ -910,38 +918,38 @@
 </p:notes>
 </file>
 
-<file path=ppt/notesSlides/notesSlide14.xml><?xml version="1.0" encoding="utf-8"?>
-<p:notes xmlns:a="http://schemas.openxmlformats.org/drawingml/2006/main" xmlns:r="http://schemas.openxmlformats.org/officeDocument/2006/relationships" xmlns:p="http://schemas.openxmlformats.org/presentationml/2006/main">
-  <p:cSld>
-    <p:spTree>
-      <p:nvGrpSpPr>
-        <p:cNvPr id="1" name=""/>
-        <p:cNvGrpSpPr/>
-        <p:nvPr/>
-      </p:nvGrpSpPr>
-      <p:grpSpPr>
-        <a:xfrm>
-          <a:off x="0" y="0"/>
-          <a:ext cx="0" cy="0"/>
-          <a:chOff x="0" y="0"/>
-          <a:chExt cx="0" cy="0"/>
-        </a:xfrm>
-      </p:grpSpPr>
-      <p:sp>
-        <p:nvSpPr>
-          <p:cNvPr id="2" name="Slide Image Placeholder 1"/>
-          <p:cNvSpPr>
-            <a:spLocks noGrp="1" noRot="1" noChangeAspect="1"/>
+<file path=ppt/notesSlides/notesSlide2.xml><?xml version="1.0" encoding="utf-8"?>
+<p:notes xmlns:a="http://schemas.openxmlformats.org/drawingml/2006/main" xmlns:r="http://schemas.openxmlformats.org/officeDocument/2006/relationships" xmlns:p="http://schemas.openxmlformats.org/presentationml/2006/main" xmlns:m="http://schemas.openxmlformats.org/officeDocument/2006/math" xmlns:w="http://schemas.openxmlformats.org/wordprocessingml/2006/main">
+  <p:cSld name="">
+    <p:spTree>
+      <p:nvGrpSpPr>
+        <p:cNvPr id="1" name=""/>
+        <p:cNvGrpSpPr/>
+        <p:nvPr/>
+      </p:nvGrpSpPr>
+      <p:grpSpPr bwMode="auto">
+        <a:xfrm>
+          <a:off x="0" y="0"/>
+          <a:ext cx="0" cy="0"/>
+          <a:chOff x="0" y="0"/>
+          <a:chExt cx="0" cy="0"/>
+        </a:xfrm>
+      </p:grpSpPr>
+      <p:sp>
+        <p:nvSpPr>
+          <p:cNvPr id="789824063" name="Slide Image Placeholder 1"/>
+          <p:cNvSpPr>
+            <a:spLocks noChangeAspect="1" noGrp="1" noRot="1"/>
           </p:cNvSpPr>
           <p:nvPr>
             <p:ph type="sldImg"/>
           </p:nvPr>
         </p:nvSpPr>
-        <p:spPr/>
-      </p:sp>
-      <p:sp>
-        <p:nvSpPr>
-          <p:cNvPr id="3" name="Notes Placeholder 2"/>
+        <p:spPr bwMode="auto"/>
+      </p:sp>
+      <p:sp>
+        <p:nvSpPr>
+          <p:cNvPr id="1075624691" name="Notes Placeholder 2"/>
           <p:cNvSpPr>
             <a:spLocks noGrp="1"/>
           </p:cNvSpPr>
@@ -949,22 +957,21 @@
             <p:ph type="body" idx="1"/>
           </p:nvPr>
         </p:nvSpPr>
-        <p:spPr/>
+        <p:spPr bwMode="auto"/>
         <p:txBody>
           <a:bodyPr/>
           <a:lstStyle/>
           <a:p>
-            <a:r>
-              <a:rPr lang="en-US" dirty="0"/>
-              <a:t/>
-            </a:r>
-            <a:endParaRPr lang="en-US" dirty="0"/>
-          </a:p>
-        </p:txBody>
-      </p:sp>
-      <p:sp>
-        <p:nvSpPr>
-          <p:cNvPr id="4" name="Slide Number Placeholder 3"/>
+            <a:pPr>
+              <a:defRPr/>
+            </a:pPr>
+            <a:endParaRPr lang="en-US"/>
+          </a:p>
+        </p:txBody>
+      </p:sp>
+      <p:sp>
+        <p:nvSpPr>
+          <p:cNvPr id="305444329" name="Slide Number Placeholder 3"/>
           <p:cNvSpPr>
             <a:spLocks noGrp="1"/>
           </p:cNvSpPr>
@@ -972,25 +979,23 @@
             <p:ph type="sldNum" sz="quarter" idx="10"/>
           </p:nvPr>
         </p:nvSpPr>
-        <p:spPr/>
+        <p:spPr bwMode="auto"/>
         <p:txBody>
           <a:bodyPr/>
           <a:lstStyle/>
           <a:p>
+            <a:pPr>
+              <a:defRPr/>
+            </a:pPr>
             <a:fld id="{F7021451-1387-4CA6-816F-3879F97B5CBC}" type="slidenum">
               <a:rPr lang="en-US"/>
-              <a:t>14</a:t>
+              <a:t>2</a:t>
             </a:fld>
             <a:endParaRPr lang="en-US"/>
           </a:p>
         </p:txBody>
       </p:sp>
     </p:spTree>
-    <p:extLst>
-      <p:ext uri="{BB962C8B-B14F-4D97-AF65-F5344CB8AC3E}">
-        <p14:creationId xmlns:p14="http://schemas.microsoft.com/office/powerpoint/2010/main" val="1024086991"/>
-      </p:ext>
-    </p:extLst>
   </p:cSld>
   <p:clrMapOvr>
     <a:masterClrMapping/>
@@ -998,38 +1003,38 @@
 </p:notes>
 </file>
 
-<file path=ppt/notesSlides/notesSlide15.xml><?xml version="1.0" encoding="utf-8"?>
-<p:notes xmlns:a="http://schemas.openxmlformats.org/drawingml/2006/main" xmlns:r="http://schemas.openxmlformats.org/officeDocument/2006/relationships" xmlns:p="http://schemas.openxmlformats.org/presentationml/2006/main">
-  <p:cSld>
-    <p:spTree>
-      <p:nvGrpSpPr>
-        <p:cNvPr id="1" name=""/>
-        <p:cNvGrpSpPr/>
-        <p:nvPr/>
-      </p:nvGrpSpPr>
-      <p:grpSpPr>
-        <a:xfrm>
-          <a:off x="0" y="0"/>
-          <a:ext cx="0" cy="0"/>
-          <a:chOff x="0" y="0"/>
-          <a:chExt cx="0" cy="0"/>
-        </a:xfrm>
-      </p:grpSpPr>
-      <p:sp>
-        <p:nvSpPr>
-          <p:cNvPr id="2" name="Slide Image Placeholder 1"/>
-          <p:cNvSpPr>
-            <a:spLocks noGrp="1" noRot="1" noChangeAspect="1"/>
+<file path=ppt/notesSlides/notesSlide3.xml><?xml version="1.0" encoding="utf-8"?>
+<p:notes xmlns:a="http://schemas.openxmlformats.org/drawingml/2006/main" xmlns:r="http://schemas.openxmlformats.org/officeDocument/2006/relationships" xmlns:p="http://schemas.openxmlformats.org/presentationml/2006/main" xmlns:m="http://schemas.openxmlformats.org/officeDocument/2006/math" xmlns:w="http://schemas.openxmlformats.org/wordprocessingml/2006/main">
+  <p:cSld name="">
+    <p:spTree>
+      <p:nvGrpSpPr>
+        <p:cNvPr id="1" name=""/>
+        <p:cNvGrpSpPr/>
+        <p:nvPr/>
+      </p:nvGrpSpPr>
+      <p:grpSpPr bwMode="auto">
+        <a:xfrm>
+          <a:off x="0" y="0"/>
+          <a:ext cx="0" cy="0"/>
+          <a:chOff x="0" y="0"/>
+          <a:chExt cx="0" cy="0"/>
+        </a:xfrm>
+      </p:grpSpPr>
+      <p:sp>
+        <p:nvSpPr>
+          <p:cNvPr id="968012059" name="Slide Image Placeholder 1"/>
+          <p:cNvSpPr>
+            <a:spLocks noChangeAspect="1" noGrp="1" noRot="1"/>
           </p:cNvSpPr>
           <p:nvPr>
             <p:ph type="sldImg"/>
           </p:nvPr>
         </p:nvSpPr>
-        <p:spPr/>
-      </p:sp>
-      <p:sp>
-        <p:nvSpPr>
-          <p:cNvPr id="3" name="Notes Placeholder 2"/>
+        <p:spPr bwMode="auto"/>
+      </p:sp>
+      <p:sp>
+        <p:nvSpPr>
+          <p:cNvPr id="87419958" name="Notes Placeholder 2"/>
           <p:cNvSpPr>
             <a:spLocks noGrp="1"/>
           </p:cNvSpPr>
@@ -1037,22 +1042,21 @@
             <p:ph type="body" idx="1"/>
           </p:nvPr>
         </p:nvSpPr>
-        <p:spPr/>
+        <p:spPr bwMode="auto"/>
         <p:txBody>
           <a:bodyPr/>
           <a:lstStyle/>
           <a:p>
-            <a:r>
-              <a:rPr lang="en-US" dirty="0"/>
-              <a:t/>
-            </a:r>
-            <a:endParaRPr lang="en-US" dirty="0"/>
-          </a:p>
-        </p:txBody>
-      </p:sp>
-      <p:sp>
-        <p:nvSpPr>
-          <p:cNvPr id="4" name="Slide Number Placeholder 3"/>
+            <a:pPr>
+              <a:defRPr/>
+            </a:pPr>
+            <a:endParaRPr lang="en-US"/>
+          </a:p>
+        </p:txBody>
+      </p:sp>
+      <p:sp>
+        <p:nvSpPr>
+          <p:cNvPr id="1056404453" name="Slide Number Placeholder 3"/>
           <p:cNvSpPr>
             <a:spLocks noGrp="1"/>
           </p:cNvSpPr>
@@ -1060,25 +1064,23 @@
             <p:ph type="sldNum" sz="quarter" idx="10"/>
           </p:nvPr>
         </p:nvSpPr>
-        <p:spPr/>
+        <p:spPr bwMode="auto"/>
         <p:txBody>
           <a:bodyPr/>
           <a:lstStyle/>
           <a:p>
+            <a:pPr>
+              <a:defRPr/>
+            </a:pPr>
             <a:fld id="{F7021451-1387-4CA6-816F-3879F97B5CBC}" type="slidenum">
               <a:rPr lang="en-US"/>
-              <a:t>15</a:t>
+              <a:t>3</a:t>
             </a:fld>
             <a:endParaRPr lang="en-US"/>
           </a:p>
         </p:txBody>
       </p:sp>
     </p:spTree>
-    <p:extLst>
-      <p:ext uri="{BB962C8B-B14F-4D97-AF65-F5344CB8AC3E}">
-        <p14:creationId xmlns:p14="http://schemas.microsoft.com/office/powerpoint/2010/main" val="1024086991"/>
-      </p:ext>
-    </p:extLst>
   </p:cSld>
   <p:clrMapOvr>
     <a:masterClrMapping/>
@@ -1086,38 +1088,38 @@
 </p:notes>
 </file>
 
-<file path=ppt/notesSlides/notesSlide2.xml><?xml version="1.0" encoding="utf-8"?>
-<p:notes xmlns:a="http://schemas.openxmlformats.org/drawingml/2006/main" xmlns:r="http://schemas.openxmlformats.org/officeDocument/2006/relationships" xmlns:p="http://schemas.openxmlformats.org/presentationml/2006/main">
-  <p:cSld>
-    <p:spTree>
-      <p:nvGrpSpPr>
-        <p:cNvPr id="1" name=""/>
-        <p:cNvGrpSpPr/>
-        <p:nvPr/>
-      </p:nvGrpSpPr>
-      <p:grpSpPr>
-        <a:xfrm>
-          <a:off x="0" y="0"/>
-          <a:ext cx="0" cy="0"/>
-          <a:chOff x="0" y="0"/>
-          <a:chExt cx="0" cy="0"/>
-        </a:xfrm>
-      </p:grpSpPr>
-      <p:sp>
-        <p:nvSpPr>
-          <p:cNvPr id="2" name="Slide Image Placeholder 1"/>
-          <p:cNvSpPr>
-            <a:spLocks noGrp="1" noRot="1" noChangeAspect="1"/>
+<file path=ppt/notesSlides/notesSlide4.xml><?xml version="1.0" encoding="utf-8"?>
+<p:notes xmlns:a="http://schemas.openxmlformats.org/drawingml/2006/main" xmlns:r="http://schemas.openxmlformats.org/officeDocument/2006/relationships" xmlns:p="http://schemas.openxmlformats.org/presentationml/2006/main" xmlns:m="http://schemas.openxmlformats.org/officeDocument/2006/math" xmlns:w="http://schemas.openxmlformats.org/wordprocessingml/2006/main">
+  <p:cSld name="">
+    <p:spTree>
+      <p:nvGrpSpPr>
+        <p:cNvPr id="1" name=""/>
+        <p:cNvGrpSpPr/>
+        <p:nvPr/>
+      </p:nvGrpSpPr>
+      <p:grpSpPr bwMode="auto">
+        <a:xfrm>
+          <a:off x="0" y="0"/>
+          <a:ext cx="0" cy="0"/>
+          <a:chOff x="0" y="0"/>
+          <a:chExt cx="0" cy="0"/>
+        </a:xfrm>
+      </p:grpSpPr>
+      <p:sp>
+        <p:nvSpPr>
+          <p:cNvPr id="862777207" name="Slide Image Placeholder 1"/>
+          <p:cNvSpPr>
+            <a:spLocks noChangeAspect="1" noGrp="1" noRot="1"/>
           </p:cNvSpPr>
           <p:nvPr>
             <p:ph type="sldImg"/>
           </p:nvPr>
         </p:nvSpPr>
-        <p:spPr/>
-      </p:sp>
-      <p:sp>
-        <p:nvSpPr>
-          <p:cNvPr id="3" name="Notes Placeholder 2"/>
+        <p:spPr bwMode="auto"/>
+      </p:sp>
+      <p:sp>
+        <p:nvSpPr>
+          <p:cNvPr id="993608194" name="Notes Placeholder 2"/>
           <p:cNvSpPr>
             <a:spLocks noGrp="1"/>
           </p:cNvSpPr>
@@ -1125,22 +1127,21 @@
             <p:ph type="body" idx="1"/>
           </p:nvPr>
         </p:nvSpPr>
-        <p:spPr/>
+        <p:spPr bwMode="auto"/>
         <p:txBody>
           <a:bodyPr/>
           <a:lstStyle/>
           <a:p>
-            <a:r>
-              <a:rPr lang="en-US" dirty="0"/>
-              <a:t/>
-            </a:r>
-            <a:endParaRPr lang="en-US" dirty="0"/>
-          </a:p>
-        </p:txBody>
-      </p:sp>
-      <p:sp>
-        <p:nvSpPr>
-          <p:cNvPr id="4" name="Slide Number Placeholder 3"/>
+            <a:pPr>
+              <a:defRPr/>
+            </a:pPr>
+            <a:endParaRPr lang="en-US"/>
+          </a:p>
+        </p:txBody>
+      </p:sp>
+      <p:sp>
+        <p:nvSpPr>
+          <p:cNvPr id="193246292" name="Slide Number Placeholder 3"/>
           <p:cNvSpPr>
             <a:spLocks noGrp="1"/>
           </p:cNvSpPr>
@@ -1148,25 +1149,23 @@
             <p:ph type="sldNum" sz="quarter" idx="10"/>
           </p:nvPr>
         </p:nvSpPr>
-        <p:spPr/>
+        <p:spPr bwMode="auto"/>
         <p:txBody>
           <a:bodyPr/>
           <a:lstStyle/>
           <a:p>
+            <a:pPr>
+              <a:defRPr/>
+            </a:pPr>
             <a:fld id="{F7021451-1387-4CA6-816F-3879F97B5CBC}" type="slidenum">
               <a:rPr lang="en-US"/>
-              <a:t>2</a:t>
+              <a:t>4</a:t>
             </a:fld>
             <a:endParaRPr lang="en-US"/>
           </a:p>
         </p:txBody>
       </p:sp>
     </p:spTree>
-    <p:extLst>
-      <p:ext uri="{BB962C8B-B14F-4D97-AF65-F5344CB8AC3E}">
-        <p14:creationId xmlns:p14="http://schemas.microsoft.com/office/powerpoint/2010/main" val="1024086991"/>
-      </p:ext>
-    </p:extLst>
   </p:cSld>
   <p:clrMapOvr>
     <a:masterClrMapping/>
@@ -1174,38 +1173,38 @@
 </p:notes>
 </file>
 
-<file path=ppt/notesSlides/notesSlide3.xml><?xml version="1.0" encoding="utf-8"?>
-<p:notes xmlns:a="http://schemas.openxmlformats.org/drawingml/2006/main" xmlns:r="http://schemas.openxmlformats.org/officeDocument/2006/relationships" xmlns:p="http://schemas.openxmlformats.org/presentationml/2006/main">
-  <p:cSld>
-    <p:spTree>
-      <p:nvGrpSpPr>
-        <p:cNvPr id="1" name=""/>
-        <p:cNvGrpSpPr/>
-        <p:nvPr/>
-      </p:nvGrpSpPr>
-      <p:grpSpPr>
-        <a:xfrm>
-          <a:off x="0" y="0"/>
-          <a:ext cx="0" cy="0"/>
-          <a:chOff x="0" y="0"/>
-          <a:chExt cx="0" cy="0"/>
-        </a:xfrm>
-      </p:grpSpPr>
-      <p:sp>
-        <p:nvSpPr>
-          <p:cNvPr id="2" name="Slide Image Placeholder 1"/>
-          <p:cNvSpPr>
-            <a:spLocks noGrp="1" noRot="1" noChangeAspect="1"/>
+<file path=ppt/notesSlides/notesSlide5.xml><?xml version="1.0" encoding="utf-8"?>
+<p:notes xmlns:a="http://schemas.openxmlformats.org/drawingml/2006/main" xmlns:r="http://schemas.openxmlformats.org/officeDocument/2006/relationships" xmlns:p="http://schemas.openxmlformats.org/presentationml/2006/main" xmlns:m="http://schemas.openxmlformats.org/officeDocument/2006/math" xmlns:w="http://schemas.openxmlformats.org/wordprocessingml/2006/main">
+  <p:cSld name="">
+    <p:spTree>
+      <p:nvGrpSpPr>
+        <p:cNvPr id="1" name=""/>
+        <p:cNvGrpSpPr/>
+        <p:nvPr/>
+      </p:nvGrpSpPr>
+      <p:grpSpPr bwMode="auto">
+        <a:xfrm>
+          <a:off x="0" y="0"/>
+          <a:ext cx="0" cy="0"/>
+          <a:chOff x="0" y="0"/>
+          <a:chExt cx="0" cy="0"/>
+        </a:xfrm>
+      </p:grpSpPr>
+      <p:sp>
+        <p:nvSpPr>
+          <p:cNvPr id="1296895977" name="Slide Image Placeholder 1"/>
+          <p:cNvSpPr>
+            <a:spLocks noChangeAspect="1" noGrp="1" noRot="1"/>
           </p:cNvSpPr>
           <p:nvPr>
             <p:ph type="sldImg"/>
           </p:nvPr>
         </p:nvSpPr>
-        <p:spPr/>
-      </p:sp>
-      <p:sp>
-        <p:nvSpPr>
-          <p:cNvPr id="3" name="Notes Placeholder 2"/>
+        <p:spPr bwMode="auto"/>
+      </p:sp>
+      <p:sp>
+        <p:nvSpPr>
+          <p:cNvPr id="1872823187" name="Notes Placeholder 2"/>
           <p:cNvSpPr>
             <a:spLocks noGrp="1"/>
           </p:cNvSpPr>
@@ -1213,22 +1212,21 @@
             <p:ph type="body" idx="1"/>
           </p:nvPr>
         </p:nvSpPr>
-        <p:spPr/>
+        <p:spPr bwMode="auto"/>
         <p:txBody>
           <a:bodyPr/>
           <a:lstStyle/>
           <a:p>
-            <a:r>
-              <a:rPr lang="en-US" dirty="0"/>
-              <a:t/>
-            </a:r>
-            <a:endParaRPr lang="en-US" dirty="0"/>
-          </a:p>
-        </p:txBody>
-      </p:sp>
-      <p:sp>
-        <p:nvSpPr>
-          <p:cNvPr id="4" name="Slide Number Placeholder 3"/>
+            <a:pPr>
+              <a:defRPr/>
+            </a:pPr>
+            <a:endParaRPr lang="en-US"/>
+          </a:p>
+        </p:txBody>
+      </p:sp>
+      <p:sp>
+        <p:nvSpPr>
+          <p:cNvPr id="1873604609" name="Slide Number Placeholder 3"/>
           <p:cNvSpPr>
             <a:spLocks noGrp="1"/>
           </p:cNvSpPr>
@@ -1236,25 +1234,23 @@
             <p:ph type="sldNum" sz="quarter" idx="10"/>
           </p:nvPr>
         </p:nvSpPr>
-        <p:spPr/>
+        <p:spPr bwMode="auto"/>
         <p:txBody>
           <a:bodyPr/>
           <a:lstStyle/>
           <a:p>
+            <a:pPr>
+              <a:defRPr/>
+            </a:pPr>
             <a:fld id="{F7021451-1387-4CA6-816F-3879F97B5CBC}" type="slidenum">
               <a:rPr lang="en-US"/>
-              <a:t>3</a:t>
+              <a:t>5</a:t>
             </a:fld>
             <a:endParaRPr lang="en-US"/>
           </a:p>
         </p:txBody>
       </p:sp>
     </p:spTree>
-    <p:extLst>
-      <p:ext uri="{BB962C8B-B14F-4D97-AF65-F5344CB8AC3E}">
-        <p14:creationId xmlns:p14="http://schemas.microsoft.com/office/powerpoint/2010/main" val="1024086991"/>
-      </p:ext>
-    </p:extLst>
   </p:cSld>
   <p:clrMapOvr>
     <a:masterClrMapping/>
@@ -1262,38 +1258,38 @@
 </p:notes>
 </file>
 
-<file path=ppt/notesSlides/notesSlide4.xml><?xml version="1.0" encoding="utf-8"?>
-<p:notes xmlns:a="http://schemas.openxmlformats.org/drawingml/2006/main" xmlns:r="http://schemas.openxmlformats.org/officeDocument/2006/relationships" xmlns:p="http://schemas.openxmlformats.org/presentationml/2006/main">
-  <p:cSld>
-    <p:spTree>
-      <p:nvGrpSpPr>
-        <p:cNvPr id="1" name=""/>
-        <p:cNvGrpSpPr/>
-        <p:nvPr/>
-      </p:nvGrpSpPr>
-      <p:grpSpPr>
-        <a:xfrm>
-          <a:off x="0" y="0"/>
-          <a:ext cx="0" cy="0"/>
-          <a:chOff x="0" y="0"/>
-          <a:chExt cx="0" cy="0"/>
-        </a:xfrm>
-      </p:grpSpPr>
-      <p:sp>
-        <p:nvSpPr>
-          <p:cNvPr id="2" name="Slide Image Placeholder 1"/>
-          <p:cNvSpPr>
-            <a:spLocks noGrp="1" noRot="1" noChangeAspect="1"/>
+<file path=ppt/notesSlides/notesSlide6.xml><?xml version="1.0" encoding="utf-8"?>
+<p:notes xmlns:a="http://schemas.openxmlformats.org/drawingml/2006/main" xmlns:r="http://schemas.openxmlformats.org/officeDocument/2006/relationships" xmlns:p="http://schemas.openxmlformats.org/presentationml/2006/main" xmlns:m="http://schemas.openxmlformats.org/officeDocument/2006/math" xmlns:w="http://schemas.openxmlformats.org/wordprocessingml/2006/main">
+  <p:cSld name="">
+    <p:spTree>
+      <p:nvGrpSpPr>
+        <p:cNvPr id="1" name=""/>
+        <p:cNvGrpSpPr/>
+        <p:nvPr/>
+      </p:nvGrpSpPr>
+      <p:grpSpPr bwMode="auto">
+        <a:xfrm>
+          <a:off x="0" y="0"/>
+          <a:ext cx="0" cy="0"/>
+          <a:chOff x="0" y="0"/>
+          <a:chExt cx="0" cy="0"/>
+        </a:xfrm>
+      </p:grpSpPr>
+      <p:sp>
+        <p:nvSpPr>
+          <p:cNvPr id="857900339" name="Slide Image Placeholder 1"/>
+          <p:cNvSpPr>
+            <a:spLocks noChangeAspect="1" noGrp="1" noRot="1"/>
           </p:cNvSpPr>
           <p:nvPr>
             <p:ph type="sldImg"/>
           </p:nvPr>
         </p:nvSpPr>
-        <p:spPr/>
-      </p:sp>
-      <p:sp>
-        <p:nvSpPr>
-          <p:cNvPr id="3" name="Notes Placeholder 2"/>
+        <p:spPr bwMode="auto"/>
+      </p:sp>
+      <p:sp>
+        <p:nvSpPr>
+          <p:cNvPr id="1768925773" name="Notes Placeholder 2"/>
           <p:cNvSpPr>
             <a:spLocks noGrp="1"/>
           </p:cNvSpPr>
@@ -1301,22 +1297,21 @@
             <p:ph type="body" idx="1"/>
           </p:nvPr>
         </p:nvSpPr>
-        <p:spPr/>
+        <p:spPr bwMode="auto"/>
         <p:txBody>
           <a:bodyPr/>
           <a:lstStyle/>
           <a:p>
-            <a:r>
-              <a:rPr lang="en-US" dirty="0"/>
-              <a:t/>
-            </a:r>
-            <a:endParaRPr lang="en-US" dirty="0"/>
-          </a:p>
-        </p:txBody>
-      </p:sp>
-      <p:sp>
-        <p:nvSpPr>
-          <p:cNvPr id="4" name="Slide Number Placeholder 3"/>
+            <a:pPr>
+              <a:defRPr/>
+            </a:pPr>
+            <a:endParaRPr lang="en-US"/>
+          </a:p>
+        </p:txBody>
+      </p:sp>
+      <p:sp>
+        <p:nvSpPr>
+          <p:cNvPr id="1989905558" name="Slide Number Placeholder 3"/>
           <p:cNvSpPr>
             <a:spLocks noGrp="1"/>
           </p:cNvSpPr>
@@ -1324,25 +1319,23 @@
             <p:ph type="sldNum" sz="quarter" idx="10"/>
           </p:nvPr>
         </p:nvSpPr>
-        <p:spPr/>
+        <p:spPr bwMode="auto"/>
         <p:txBody>
           <a:bodyPr/>
           <a:lstStyle/>
           <a:p>
+            <a:pPr>
+              <a:defRPr/>
+            </a:pPr>
             <a:fld id="{F7021451-1387-4CA6-816F-3879F97B5CBC}" type="slidenum">
               <a:rPr lang="en-US"/>
-              <a:t>4</a:t>
+              <a:t>6</a:t>
             </a:fld>
             <a:endParaRPr lang="en-US"/>
           </a:p>
         </p:txBody>
       </p:sp>
     </p:spTree>
-    <p:extLst>
-      <p:ext uri="{BB962C8B-B14F-4D97-AF65-F5344CB8AC3E}">
-        <p14:creationId xmlns:p14="http://schemas.microsoft.com/office/powerpoint/2010/main" val="1024086991"/>
-      </p:ext>
-    </p:extLst>
   </p:cSld>
   <p:clrMapOvr>
     <a:masterClrMapping/>
@@ -1350,38 +1343,38 @@
 </p:notes>
 </file>
 
-<file path=ppt/notesSlides/notesSlide5.xml><?xml version="1.0" encoding="utf-8"?>
-<p:notes xmlns:a="http://schemas.openxmlformats.org/drawingml/2006/main" xmlns:r="http://schemas.openxmlformats.org/officeDocument/2006/relationships" xmlns:p="http://schemas.openxmlformats.org/presentationml/2006/main">
-  <p:cSld>
-    <p:spTree>
-      <p:nvGrpSpPr>
-        <p:cNvPr id="1" name=""/>
-        <p:cNvGrpSpPr/>
-        <p:nvPr/>
-      </p:nvGrpSpPr>
-      <p:grpSpPr>
-        <a:xfrm>
-          <a:off x="0" y="0"/>
-          <a:ext cx="0" cy="0"/>
-          <a:chOff x="0" y="0"/>
-          <a:chExt cx="0" cy="0"/>
-        </a:xfrm>
-      </p:grpSpPr>
-      <p:sp>
-        <p:nvSpPr>
-          <p:cNvPr id="2" name="Slide Image Placeholder 1"/>
-          <p:cNvSpPr>
-            <a:spLocks noGrp="1" noRot="1" noChangeAspect="1"/>
+<file path=ppt/notesSlides/notesSlide7.xml><?xml version="1.0" encoding="utf-8"?>
+<p:notes xmlns:a="http://schemas.openxmlformats.org/drawingml/2006/main" xmlns:r="http://schemas.openxmlformats.org/officeDocument/2006/relationships" xmlns:p="http://schemas.openxmlformats.org/presentationml/2006/main" xmlns:m="http://schemas.openxmlformats.org/officeDocument/2006/math" xmlns:w="http://schemas.openxmlformats.org/wordprocessingml/2006/main">
+  <p:cSld name="">
+    <p:spTree>
+      <p:nvGrpSpPr>
+        <p:cNvPr id="1" name=""/>
+        <p:cNvGrpSpPr/>
+        <p:nvPr/>
+      </p:nvGrpSpPr>
+      <p:grpSpPr bwMode="auto">
+        <a:xfrm>
+          <a:off x="0" y="0"/>
+          <a:ext cx="0" cy="0"/>
+          <a:chOff x="0" y="0"/>
+          <a:chExt cx="0" cy="0"/>
+        </a:xfrm>
+      </p:grpSpPr>
+      <p:sp>
+        <p:nvSpPr>
+          <p:cNvPr id="2111830666" name="Slide Image Placeholder 1"/>
+          <p:cNvSpPr>
+            <a:spLocks noChangeAspect="1" noGrp="1" noRot="1"/>
           </p:cNvSpPr>
           <p:nvPr>
             <p:ph type="sldImg"/>
           </p:nvPr>
         </p:nvSpPr>
-        <p:spPr/>
-      </p:sp>
-      <p:sp>
-        <p:nvSpPr>
-          <p:cNvPr id="3" name="Notes Placeholder 2"/>
+        <p:spPr bwMode="auto"/>
+      </p:sp>
+      <p:sp>
+        <p:nvSpPr>
+          <p:cNvPr id="198516667" name="Notes Placeholder 2"/>
           <p:cNvSpPr>
             <a:spLocks noGrp="1"/>
           </p:cNvSpPr>
@@ -1389,22 +1382,21 @@
             <p:ph type="body" idx="1"/>
           </p:nvPr>
         </p:nvSpPr>
-        <p:spPr/>
+        <p:spPr bwMode="auto"/>
         <p:txBody>
           <a:bodyPr/>
           <a:lstStyle/>
           <a:p>
-            <a:r>
-              <a:rPr lang="en-US" dirty="0"/>
-              <a:t/>
-            </a:r>
-            <a:endParaRPr lang="en-US" dirty="0"/>
-          </a:p>
-        </p:txBody>
-      </p:sp>
-      <p:sp>
-        <p:nvSpPr>
-          <p:cNvPr id="4" name="Slide Number Placeholder 3"/>
+            <a:pPr>
+              <a:defRPr/>
+            </a:pPr>
+            <a:endParaRPr lang="en-US"/>
+          </a:p>
+        </p:txBody>
+      </p:sp>
+      <p:sp>
+        <p:nvSpPr>
+          <p:cNvPr id="1253205776" name="Slide Number Placeholder 3"/>
           <p:cNvSpPr>
             <a:spLocks noGrp="1"/>
           </p:cNvSpPr>
@@ -1412,25 +1404,23 @@
             <p:ph type="sldNum" sz="quarter" idx="10"/>
           </p:nvPr>
         </p:nvSpPr>
-        <p:spPr/>
+        <p:spPr bwMode="auto"/>
         <p:txBody>
           <a:bodyPr/>
           <a:lstStyle/>
           <a:p>
+            <a:pPr>
+              <a:defRPr/>
+            </a:pPr>
             <a:fld id="{F7021451-1387-4CA6-816F-3879F97B5CBC}" type="slidenum">
               <a:rPr lang="en-US"/>
-              <a:t>5</a:t>
+              <a:t>7</a:t>
             </a:fld>
             <a:endParaRPr lang="en-US"/>
           </a:p>
         </p:txBody>
       </p:sp>
     </p:spTree>
-    <p:extLst>
-      <p:ext uri="{BB962C8B-B14F-4D97-AF65-F5344CB8AC3E}">
-        <p14:creationId xmlns:p14="http://schemas.microsoft.com/office/powerpoint/2010/main" val="1024086991"/>
-      </p:ext>
-    </p:extLst>
   </p:cSld>
   <p:clrMapOvr>
     <a:masterClrMapping/>
@@ -1438,38 +1428,38 @@
 </p:notes>
 </file>
 
-<file path=ppt/notesSlides/notesSlide6.xml><?xml version="1.0" encoding="utf-8"?>
-<p:notes xmlns:a="http://schemas.openxmlformats.org/drawingml/2006/main" xmlns:r="http://schemas.openxmlformats.org/officeDocument/2006/relationships" xmlns:p="http://schemas.openxmlformats.org/presentationml/2006/main">
-  <p:cSld>
-    <p:spTree>
-      <p:nvGrpSpPr>
-        <p:cNvPr id="1" name=""/>
-        <p:cNvGrpSpPr/>
-        <p:nvPr/>
-      </p:nvGrpSpPr>
-      <p:grpSpPr>
-        <a:xfrm>
-          <a:off x="0" y="0"/>
-          <a:ext cx="0" cy="0"/>
-          <a:chOff x="0" y="0"/>
-          <a:chExt cx="0" cy="0"/>
-        </a:xfrm>
-      </p:grpSpPr>
-      <p:sp>
-        <p:nvSpPr>
-          <p:cNvPr id="2" name="Slide Image Placeholder 1"/>
-          <p:cNvSpPr>
-            <a:spLocks noGrp="1" noRot="1" noChangeAspect="1"/>
+<file path=ppt/notesSlides/notesSlide8.xml><?xml version="1.0" encoding="utf-8"?>
+<p:notes xmlns:a="http://schemas.openxmlformats.org/drawingml/2006/main" xmlns:r="http://schemas.openxmlformats.org/officeDocument/2006/relationships" xmlns:p="http://schemas.openxmlformats.org/presentationml/2006/main" xmlns:m="http://schemas.openxmlformats.org/officeDocument/2006/math" xmlns:w="http://schemas.openxmlformats.org/wordprocessingml/2006/main">
+  <p:cSld name="">
+    <p:spTree>
+      <p:nvGrpSpPr>
+        <p:cNvPr id="1" name=""/>
+        <p:cNvGrpSpPr/>
+        <p:nvPr/>
+      </p:nvGrpSpPr>
+      <p:grpSpPr bwMode="auto">
+        <a:xfrm>
+          <a:off x="0" y="0"/>
+          <a:ext cx="0" cy="0"/>
+          <a:chOff x="0" y="0"/>
+          <a:chExt cx="0" cy="0"/>
+        </a:xfrm>
+      </p:grpSpPr>
+      <p:sp>
+        <p:nvSpPr>
+          <p:cNvPr id="1005846584" name="Slide Image Placeholder 1"/>
+          <p:cNvSpPr>
+            <a:spLocks noChangeAspect="1" noGrp="1" noRot="1"/>
           </p:cNvSpPr>
           <p:nvPr>
             <p:ph type="sldImg"/>
           </p:nvPr>
         </p:nvSpPr>
-        <p:spPr/>
-      </p:sp>
-      <p:sp>
-        <p:nvSpPr>
-          <p:cNvPr id="3" name="Notes Placeholder 2"/>
+        <p:spPr bwMode="auto"/>
+      </p:sp>
+      <p:sp>
+        <p:nvSpPr>
+          <p:cNvPr id="1545617182" name="Notes Placeholder 2"/>
           <p:cNvSpPr>
             <a:spLocks noGrp="1"/>
           </p:cNvSpPr>
@@ -1477,22 +1467,21 @@
             <p:ph type="body" idx="1"/>
           </p:nvPr>
         </p:nvSpPr>
-        <p:spPr/>
+        <p:spPr bwMode="auto"/>
         <p:txBody>
           <a:bodyPr/>
           <a:lstStyle/>
           <a:p>
-            <a:r>
-              <a:rPr lang="en-US" dirty="0"/>
-              <a:t/>
-            </a:r>
-            <a:endParaRPr lang="en-US" dirty="0"/>
-          </a:p>
-        </p:txBody>
-      </p:sp>
-      <p:sp>
-        <p:nvSpPr>
-          <p:cNvPr id="4" name="Slide Number Placeholder 3"/>
+            <a:pPr>
+              <a:defRPr/>
+            </a:pPr>
+            <a:endParaRPr lang="en-US"/>
+          </a:p>
+        </p:txBody>
+      </p:sp>
+      <p:sp>
+        <p:nvSpPr>
+          <p:cNvPr id="285908142" name="Slide Number Placeholder 3"/>
           <p:cNvSpPr>
             <a:spLocks noGrp="1"/>
           </p:cNvSpPr>
@@ -1500,25 +1489,23 @@
             <p:ph type="sldNum" sz="quarter" idx="10"/>
           </p:nvPr>
         </p:nvSpPr>
-        <p:spPr/>
+        <p:spPr bwMode="auto"/>
         <p:txBody>
           <a:bodyPr/>
           <a:lstStyle/>
           <a:p>
+            <a:pPr>
+              <a:defRPr/>
+            </a:pPr>
             <a:fld id="{F7021451-1387-4CA6-816F-3879F97B5CBC}" type="slidenum">
               <a:rPr lang="en-US"/>
-              <a:t>6</a:t>
+              <a:t>8</a:t>
             </a:fld>
             <a:endParaRPr lang="en-US"/>
           </a:p>
         </p:txBody>
       </p:sp>
     </p:spTree>
-    <p:extLst>
-      <p:ext uri="{BB962C8B-B14F-4D97-AF65-F5344CB8AC3E}">
-        <p14:creationId xmlns:p14="http://schemas.microsoft.com/office/powerpoint/2010/main" val="1024086991"/>
-      </p:ext>
-    </p:extLst>
   </p:cSld>
   <p:clrMapOvr>
     <a:masterClrMapping/>
@@ -1526,38 +1513,38 @@
 </p:notes>
 </file>
 
-<file path=ppt/notesSlides/notesSlide7.xml><?xml version="1.0" encoding="utf-8"?>
-<p:notes xmlns:a="http://schemas.openxmlformats.org/drawingml/2006/main" xmlns:r="http://schemas.openxmlformats.org/officeDocument/2006/relationships" xmlns:p="http://schemas.openxmlformats.org/presentationml/2006/main">
-  <p:cSld>
-    <p:spTree>
-      <p:nvGrpSpPr>
-        <p:cNvPr id="1" name=""/>
-        <p:cNvGrpSpPr/>
-        <p:nvPr/>
-      </p:nvGrpSpPr>
-      <p:grpSpPr>
-        <a:xfrm>
-          <a:off x="0" y="0"/>
-          <a:ext cx="0" cy="0"/>
-          <a:chOff x="0" y="0"/>
-          <a:chExt cx="0" cy="0"/>
-        </a:xfrm>
-      </p:grpSpPr>
-      <p:sp>
-        <p:nvSpPr>
-          <p:cNvPr id="2" name="Slide Image Placeholder 1"/>
-          <p:cNvSpPr>
-            <a:spLocks noGrp="1" noRot="1" noChangeAspect="1"/>
+<file path=ppt/notesSlides/notesSlide9.xml><?xml version="1.0" encoding="utf-8"?>
+<p:notes xmlns:a="http://schemas.openxmlformats.org/drawingml/2006/main" xmlns:r="http://schemas.openxmlformats.org/officeDocument/2006/relationships" xmlns:p="http://schemas.openxmlformats.org/presentationml/2006/main" xmlns:m="http://schemas.openxmlformats.org/officeDocument/2006/math" xmlns:w="http://schemas.openxmlformats.org/wordprocessingml/2006/main">
+  <p:cSld name="">
+    <p:spTree>
+      <p:nvGrpSpPr>
+        <p:cNvPr id="1" name=""/>
+        <p:cNvGrpSpPr/>
+        <p:nvPr/>
+      </p:nvGrpSpPr>
+      <p:grpSpPr bwMode="auto">
+        <a:xfrm>
+          <a:off x="0" y="0"/>
+          <a:ext cx="0" cy="0"/>
+          <a:chOff x="0" y="0"/>
+          <a:chExt cx="0" cy="0"/>
+        </a:xfrm>
+      </p:grpSpPr>
+      <p:sp>
+        <p:nvSpPr>
+          <p:cNvPr id="93893373" name="Slide Image Placeholder 1"/>
+          <p:cNvSpPr>
+            <a:spLocks noChangeAspect="1" noGrp="1" noRot="1"/>
           </p:cNvSpPr>
           <p:nvPr>
             <p:ph type="sldImg"/>
           </p:nvPr>
         </p:nvSpPr>
-        <p:spPr/>
-      </p:sp>
-      <p:sp>
-        <p:nvSpPr>
-          <p:cNvPr id="3" name="Notes Placeholder 2"/>
+        <p:spPr bwMode="auto"/>
+      </p:sp>
+      <p:sp>
+        <p:nvSpPr>
+          <p:cNvPr id="1877803625" name="Notes Placeholder 2"/>
           <p:cNvSpPr>
             <a:spLocks noGrp="1"/>
           </p:cNvSpPr>
@@ -1565,22 +1552,21 @@
             <p:ph type="body" idx="1"/>
           </p:nvPr>
         </p:nvSpPr>
-        <p:spPr/>
+        <p:spPr bwMode="auto"/>
         <p:txBody>
           <a:bodyPr/>
           <a:lstStyle/>
           <a:p>
-            <a:r>
-              <a:rPr lang="en-US" dirty="0"/>
-              <a:t/>
-            </a:r>
-            <a:endParaRPr lang="en-US" dirty="0"/>
-          </a:p>
-        </p:txBody>
-      </p:sp>
-      <p:sp>
-        <p:nvSpPr>
-          <p:cNvPr id="4" name="Slide Number Placeholder 3"/>
+            <a:pPr>
+              <a:defRPr/>
+            </a:pPr>
+            <a:endParaRPr lang="en-US"/>
+          </a:p>
+        </p:txBody>
+      </p:sp>
+      <p:sp>
+        <p:nvSpPr>
+          <p:cNvPr id="1284330339" name="Slide Number Placeholder 3"/>
           <p:cNvSpPr>
             <a:spLocks noGrp="1"/>
           </p:cNvSpPr>
@@ -1588,25 +1574,23 @@
             <p:ph type="sldNum" sz="quarter" idx="10"/>
           </p:nvPr>
         </p:nvSpPr>
-        <p:spPr/>
+        <p:spPr bwMode="auto"/>
         <p:txBody>
           <a:bodyPr/>
           <a:lstStyle/>
           <a:p>
+            <a:pPr>
+              <a:defRPr/>
+            </a:pPr>
             <a:fld id="{F7021451-1387-4CA6-816F-3879F97B5CBC}" type="slidenum">
               <a:rPr lang="en-US"/>
-              <a:t>7</a:t>
+              <a:t>9</a:t>
             </a:fld>
             <a:endParaRPr lang="en-US"/>
           </a:p>
         </p:txBody>
       </p:sp>
     </p:spTree>
-    <p:extLst>
-      <p:ext uri="{BB962C8B-B14F-4D97-AF65-F5344CB8AC3E}">
-        <p14:creationId xmlns:p14="http://schemas.microsoft.com/office/powerpoint/2010/main" val="1024086991"/>
-      </p:ext>
-    </p:extLst>
   </p:cSld>
   <p:clrMapOvr>
     <a:masterClrMapping/>
@@ -1614,184 +1598,8 @@
 </p:notes>
 </file>
 
-<file path=ppt/notesSlides/notesSlide8.xml><?xml version="1.0" encoding="utf-8"?>
-<p:notes xmlns:a="http://schemas.openxmlformats.org/drawingml/2006/main" xmlns:r="http://schemas.openxmlformats.org/officeDocument/2006/relationships" xmlns:p="http://schemas.openxmlformats.org/presentationml/2006/main">
-  <p:cSld>
-    <p:spTree>
-      <p:nvGrpSpPr>
-        <p:cNvPr id="1" name=""/>
-        <p:cNvGrpSpPr/>
-        <p:nvPr/>
-      </p:nvGrpSpPr>
-      <p:grpSpPr>
-        <a:xfrm>
-          <a:off x="0" y="0"/>
-          <a:ext cx="0" cy="0"/>
-          <a:chOff x="0" y="0"/>
-          <a:chExt cx="0" cy="0"/>
-        </a:xfrm>
-      </p:grpSpPr>
-      <p:sp>
-        <p:nvSpPr>
-          <p:cNvPr id="2" name="Slide Image Placeholder 1"/>
-          <p:cNvSpPr>
-            <a:spLocks noGrp="1" noRot="1" noChangeAspect="1"/>
-          </p:cNvSpPr>
-          <p:nvPr>
-            <p:ph type="sldImg"/>
-          </p:nvPr>
-        </p:nvSpPr>
-        <p:spPr/>
-      </p:sp>
-      <p:sp>
-        <p:nvSpPr>
-          <p:cNvPr id="3" name="Notes Placeholder 2"/>
-          <p:cNvSpPr>
-            <a:spLocks noGrp="1"/>
-          </p:cNvSpPr>
-          <p:nvPr>
-            <p:ph type="body" idx="1"/>
-          </p:nvPr>
-        </p:nvSpPr>
-        <p:spPr/>
-        <p:txBody>
-          <a:bodyPr/>
-          <a:lstStyle/>
-          <a:p>
-            <a:r>
-              <a:rPr lang="en-US" dirty="0"/>
-              <a:t/>
-            </a:r>
-            <a:endParaRPr lang="en-US" dirty="0"/>
-          </a:p>
-        </p:txBody>
-      </p:sp>
-      <p:sp>
-        <p:nvSpPr>
-          <p:cNvPr id="4" name="Slide Number Placeholder 3"/>
-          <p:cNvSpPr>
-            <a:spLocks noGrp="1"/>
-          </p:cNvSpPr>
-          <p:nvPr>
-            <p:ph type="sldNum" sz="quarter" idx="10"/>
-          </p:nvPr>
-        </p:nvSpPr>
-        <p:spPr/>
-        <p:txBody>
-          <a:bodyPr/>
-          <a:lstStyle/>
-          <a:p>
-            <a:fld id="{F7021451-1387-4CA6-816F-3879F97B5CBC}" type="slidenum">
-              <a:rPr lang="en-US"/>
-              <a:t>8</a:t>
-            </a:fld>
-            <a:endParaRPr lang="en-US"/>
-          </a:p>
-        </p:txBody>
-      </p:sp>
-    </p:spTree>
-    <p:extLst>
-      <p:ext uri="{BB962C8B-B14F-4D97-AF65-F5344CB8AC3E}">
-        <p14:creationId xmlns:p14="http://schemas.microsoft.com/office/powerpoint/2010/main" val="1024086991"/>
-      </p:ext>
-    </p:extLst>
-  </p:cSld>
-  <p:clrMapOvr>
-    <a:masterClrMapping/>
-  </p:clrMapOvr>
-</p:notes>
-</file>
-
-<file path=ppt/notesSlides/notesSlide9.xml><?xml version="1.0" encoding="utf-8"?>
-<p:notes xmlns:a="http://schemas.openxmlformats.org/drawingml/2006/main" xmlns:r="http://schemas.openxmlformats.org/officeDocument/2006/relationships" xmlns:p="http://schemas.openxmlformats.org/presentationml/2006/main">
-  <p:cSld>
-    <p:spTree>
-      <p:nvGrpSpPr>
-        <p:cNvPr id="1" name=""/>
-        <p:cNvGrpSpPr/>
-        <p:nvPr/>
-      </p:nvGrpSpPr>
-      <p:grpSpPr>
-        <a:xfrm>
-          <a:off x="0" y="0"/>
-          <a:ext cx="0" cy="0"/>
-          <a:chOff x="0" y="0"/>
-          <a:chExt cx="0" cy="0"/>
-        </a:xfrm>
-      </p:grpSpPr>
-      <p:sp>
-        <p:nvSpPr>
-          <p:cNvPr id="2" name="Slide Image Placeholder 1"/>
-          <p:cNvSpPr>
-            <a:spLocks noGrp="1" noRot="1" noChangeAspect="1"/>
-          </p:cNvSpPr>
-          <p:nvPr>
-            <p:ph type="sldImg"/>
-          </p:nvPr>
-        </p:nvSpPr>
-        <p:spPr/>
-      </p:sp>
-      <p:sp>
-        <p:nvSpPr>
-          <p:cNvPr id="3" name="Notes Placeholder 2"/>
-          <p:cNvSpPr>
-            <a:spLocks noGrp="1"/>
-          </p:cNvSpPr>
-          <p:nvPr>
-            <p:ph type="body" idx="1"/>
-          </p:nvPr>
-        </p:nvSpPr>
-        <p:spPr/>
-        <p:txBody>
-          <a:bodyPr/>
-          <a:lstStyle/>
-          <a:p>
-            <a:r>
-              <a:rPr lang="en-US" dirty="0"/>
-              <a:t/>
-            </a:r>
-            <a:endParaRPr lang="en-US" dirty="0"/>
-          </a:p>
-        </p:txBody>
-      </p:sp>
-      <p:sp>
-        <p:nvSpPr>
-          <p:cNvPr id="4" name="Slide Number Placeholder 3"/>
-          <p:cNvSpPr>
-            <a:spLocks noGrp="1"/>
-          </p:cNvSpPr>
-          <p:nvPr>
-            <p:ph type="sldNum" sz="quarter" idx="10"/>
-          </p:nvPr>
-        </p:nvSpPr>
-        <p:spPr/>
-        <p:txBody>
-          <a:bodyPr/>
-          <a:lstStyle/>
-          <a:p>
-            <a:fld id="{F7021451-1387-4CA6-816F-3879F97B5CBC}" type="slidenum">
-              <a:rPr lang="en-US"/>
-              <a:t>9</a:t>
-            </a:fld>
-            <a:endParaRPr lang="en-US"/>
-          </a:p>
-        </p:txBody>
-      </p:sp>
-    </p:spTree>
-    <p:extLst>
-      <p:ext uri="{BB962C8B-B14F-4D97-AF65-F5344CB8AC3E}">
-        <p14:creationId xmlns:p14="http://schemas.microsoft.com/office/powerpoint/2010/main" val="1024086991"/>
-      </p:ext>
-    </p:extLst>
-  </p:cSld>
-  <p:clrMapOvr>
-    <a:masterClrMapping/>
-  </p:clrMapOvr>
-</p:notes>
-</file>
-
 <file path=ppt/slideLayouts/slideLayout1.xml><?xml version="1.0" encoding="utf-8"?>
-<p:sldLayout xmlns:a="http://schemas.openxmlformats.org/drawingml/2006/main" xmlns:r="http://schemas.openxmlformats.org/officeDocument/2006/relationships" xmlns:p="http://schemas.openxmlformats.org/presentationml/2006/main" preserve="1">
+<p:sldLayout xmlns:a="http://schemas.openxmlformats.org/drawingml/2006/main" xmlns:r="http://schemas.openxmlformats.org/officeDocument/2006/relationships" xmlns:p="http://schemas.openxmlformats.org/presentationml/2006/main" xmlns:m="http://schemas.openxmlformats.org/officeDocument/2006/math" xmlns:w="http://schemas.openxmlformats.org/wordprocessingml/2006/main" matchingName="" preserve="1" showMasterPhAnim="0" showMasterSp="1" userDrawn="1">
   <p:cSld name="DEFAULT">
     <p:bg>
       <p:bgRef idx="1001">
@@ -1804,7 +1612,7 @@
         <p:cNvGrpSpPr/>
         <p:nvPr/>
       </p:nvGrpSpPr>
-      <p:grpSpPr>
+      <p:grpSpPr bwMode="auto">
         <a:xfrm>
           <a:off x="0" y="0"/>
           <a:ext cx="0" cy="0"/>
@@ -1821,15 +1629,15 @@
 </file>
 
 <file path=ppt/slideMasters/slideMaster1.xml><?xml version="1.0" encoding="utf-8"?>
-<p:sldMaster xmlns:a="http://schemas.openxmlformats.org/drawingml/2006/main" xmlns:r="http://schemas.openxmlformats.org/officeDocument/2006/relationships" xmlns:p="http://schemas.openxmlformats.org/presentationml/2006/main">
-  <p:cSld>
-    <p:spTree>
-      <p:nvGrpSpPr>
-        <p:cNvPr id="1" name=""/>
-        <p:cNvGrpSpPr/>
-        <p:nvPr/>
-      </p:nvGrpSpPr>
-      <p:grpSpPr>
+<p:sldMaster xmlns:a="http://schemas.openxmlformats.org/drawingml/2006/main" xmlns:r="http://schemas.openxmlformats.org/officeDocument/2006/relationships" xmlns:p="http://schemas.openxmlformats.org/presentationml/2006/main" xmlns:m="http://schemas.openxmlformats.org/officeDocument/2006/math" xmlns:w="http://schemas.openxmlformats.org/wordprocessingml/2006/main" preserve="0">
+  <p:cSld name="">
+    <p:spTree>
+      <p:nvGrpSpPr>
+        <p:cNvPr id="1" name=""/>
+        <p:cNvGrpSpPr/>
+        <p:nvPr/>
+      </p:nvGrpSpPr>
+      <p:grpSpPr bwMode="auto">
         <a:xfrm>
           <a:off x="0" y="0"/>
           <a:ext cx="0" cy="0"/>
@@ -1843,15 +1651,15 @@
   <p:sldLayoutIdLst>
     <p:sldLayoutId id="2147483649" r:id="rId1"/>
   </p:sldLayoutIdLst>
-  <p:hf sldNum="0" hdr="0" ftr="0" dt="0"/>
+  <p:hf dt="0" ftr="0" hdr="0" sldNum="0"/>
   <p:txStyles>
     <p:titleStyle>
-      <a:lvl1pPr algn="ctr" defTabSz="914400" rtl="0" eaLnBrk="1" latinLnBrk="0" hangingPunct="1">
+      <a:lvl1pPr algn="ctr" defTabSz="914400" rtl="0">
         <a:spcBef>
-          <a:spcPct val="0"/>
+          <a:spcPts val="0"/>
         </a:spcBef>
         <a:buNone/>
-        <a:defRPr sz="4400" kern="1200">
+        <a:defRPr sz="4400">
           <a:solidFill>
             <a:schemeClr val="tx1"/>
           </a:solidFill>
@@ -1862,13 +1670,13 @@
       </a:lvl1pPr>
     </p:titleStyle>
     <p:bodyStyle>
-      <a:lvl1pPr marL="342900" indent="-342900" algn="l" defTabSz="914400" rtl="0" eaLnBrk="1" latinLnBrk="0" hangingPunct="1">
+      <a:lvl1pPr marL="342900" indent="-342900" algn="l" defTabSz="914400" rtl="0">
         <a:spcBef>
-          <a:spcPct val="20000"/>
+          <a:spcPts val="0"/>
         </a:spcBef>
-        <a:buFont typeface="Arial" pitchFamily="34" charset="0"/>
+        <a:buFont typeface="Arial"/>
         <a:buChar char="•"/>
-        <a:defRPr sz="3200" kern="1200">
+        <a:defRPr sz="3200">
           <a:solidFill>
             <a:schemeClr val="tx1"/>
           </a:solidFill>
@@ -1877,13 +1685,13 @@
           <a:cs typeface="+mn-cs"/>
         </a:defRPr>
       </a:lvl1pPr>
-      <a:lvl2pPr marL="742950" indent="-285750" algn="l" defTabSz="914400" rtl="0" eaLnBrk="1" latinLnBrk="0" hangingPunct="1">
+      <a:lvl2pPr marL="742950" indent="-285750" algn="l" defTabSz="914400" rtl="0">
         <a:spcBef>
-          <a:spcPct val="20000"/>
+          <a:spcPts val="0"/>
         </a:spcBef>
-        <a:buFont typeface="Arial" pitchFamily="34" charset="0"/>
+        <a:buFont typeface="Arial"/>
         <a:buChar char="–"/>
-        <a:defRPr sz="2800" kern="1200">
+        <a:defRPr sz="2800">
           <a:solidFill>
             <a:schemeClr val="tx1"/>
           </a:solidFill>
@@ -1892,13 +1700,13 @@
           <a:cs typeface="+mn-cs"/>
         </a:defRPr>
       </a:lvl2pPr>
-      <a:lvl3pPr marL="1143000" indent="-228600" algn="l" defTabSz="914400" rtl="0" eaLnBrk="1" latinLnBrk="0" hangingPunct="1">
+      <a:lvl3pPr marL="1143000" indent="-228600" algn="l" defTabSz="914400" rtl="0">
         <a:spcBef>
-          <a:spcPct val="20000"/>
+          <a:spcPts val="0"/>
         </a:spcBef>
-        <a:buFont typeface="Arial" pitchFamily="34" charset="0"/>
+        <a:buFont typeface="Arial"/>
         <a:buChar char="•"/>
-        <a:defRPr sz="2400" kern="1200">
+        <a:defRPr sz="2400">
           <a:solidFill>
             <a:schemeClr val="tx1"/>
           </a:solidFill>
@@ -1907,13 +1715,13 @@
           <a:cs typeface="+mn-cs"/>
         </a:defRPr>
       </a:lvl3pPr>
-      <a:lvl4pPr marL="1600200" indent="-228600" algn="l" defTabSz="914400" rtl="0" eaLnBrk="1" latinLnBrk="0" hangingPunct="1">
+      <a:lvl4pPr marL="1600200" indent="-228600" algn="l" defTabSz="914400" rtl="0">
         <a:spcBef>
-          <a:spcPct val="20000"/>
+          <a:spcPts val="0"/>
         </a:spcBef>
-        <a:buFont typeface="Arial" pitchFamily="34" charset="0"/>
+        <a:buFont typeface="Arial"/>
         <a:buChar char="–"/>
-        <a:defRPr sz="2000" kern="1200">
+        <a:defRPr sz="2000">
           <a:solidFill>
             <a:schemeClr val="tx1"/>
           </a:solidFill>
@@ -1922,13 +1730,13 @@
           <a:cs typeface="+mn-cs"/>
         </a:defRPr>
       </a:lvl4pPr>
-      <a:lvl5pPr marL="2057400" indent="-228600" algn="l" defTabSz="914400" rtl="0" eaLnBrk="1" latinLnBrk="0" hangingPunct="1">
+      <a:lvl5pPr marL="2057400" indent="-228600" algn="l" defTabSz="914400" rtl="0">
         <a:spcBef>
-          <a:spcPct val="20000"/>
+          <a:spcPts val="0"/>
         </a:spcBef>
-        <a:buFont typeface="Arial" pitchFamily="34" charset="0"/>
+        <a:buFont typeface="Arial"/>
         <a:buChar char="»"/>
-        <a:defRPr sz="2000" kern="1200">
+        <a:defRPr sz="2000">
           <a:solidFill>
             <a:schemeClr val="tx1"/>
           </a:solidFill>
@@ -1937,13 +1745,13 @@
           <a:cs typeface="+mn-cs"/>
         </a:defRPr>
       </a:lvl5pPr>
-      <a:lvl6pPr marL="2514600" indent="-228600" algn="l" defTabSz="914400" rtl="0" eaLnBrk="1" latinLnBrk="0" hangingPunct="1">
+      <a:lvl6pPr marL="2514600" indent="-228600" algn="l" defTabSz="914400" rtl="0">
         <a:spcBef>
-          <a:spcPct val="20000"/>
+          <a:spcPts val="0"/>
         </a:spcBef>
-        <a:buFont typeface="Arial" pitchFamily="34" charset="0"/>
+        <a:buFont typeface="Arial"/>
         <a:buChar char="•"/>
-        <a:defRPr sz="2000" kern="1200">
+        <a:defRPr sz="2000">
           <a:solidFill>
             <a:schemeClr val="tx1"/>
           </a:solidFill>
@@ -1952,13 +1760,13 @@
           <a:cs typeface="+mn-cs"/>
         </a:defRPr>
       </a:lvl6pPr>
-      <a:lvl7pPr marL="2971800" indent="-228600" algn="l" defTabSz="914400" rtl="0" eaLnBrk="1" latinLnBrk="0" hangingPunct="1">
+      <a:lvl7pPr marL="2971800" indent="-228600" algn="l" defTabSz="914400" rtl="0">
         <a:spcBef>
-          <a:spcPct val="20000"/>
+          <a:spcPts val="0"/>
         </a:spcBef>
-        <a:buFont typeface="Arial" pitchFamily="34" charset="0"/>
+        <a:buFont typeface="Arial"/>
         <a:buChar char="•"/>
-        <a:defRPr sz="2000" kern="1200">
+        <a:defRPr sz="2000">
           <a:solidFill>
             <a:schemeClr val="tx1"/>
           </a:solidFill>
@@ -1967,13 +1775,13 @@
           <a:cs typeface="+mn-cs"/>
         </a:defRPr>
       </a:lvl7pPr>
-      <a:lvl8pPr marL="3429000" indent="-228600" algn="l" defTabSz="914400" rtl="0" eaLnBrk="1" latinLnBrk="0" hangingPunct="1">
+      <a:lvl8pPr marL="3429000" indent="-228600" algn="l" defTabSz="914400" rtl="0">
         <a:spcBef>
-          <a:spcPct val="20000"/>
+          <a:spcPts val="0"/>
         </a:spcBef>
-        <a:buFont typeface="Arial" pitchFamily="34" charset="0"/>
+        <a:buFont typeface="Arial"/>
         <a:buChar char="•"/>
-        <a:defRPr sz="2000" kern="1200">
+        <a:defRPr sz="2000">
           <a:solidFill>
             <a:schemeClr val="tx1"/>
           </a:solidFill>
@@ -1982,13 +1790,13 @@
           <a:cs typeface="+mn-cs"/>
         </a:defRPr>
       </a:lvl8pPr>
-      <a:lvl9pPr marL="3886200" indent="-228600" algn="l" defTabSz="914400" rtl="0" eaLnBrk="1" latinLnBrk="0" hangingPunct="1">
+      <a:lvl9pPr marL="3886200" indent="-228600" algn="l" defTabSz="914400" rtl="0">
         <a:spcBef>
-          <a:spcPct val="20000"/>
+          <a:spcPts val="0"/>
         </a:spcBef>
-        <a:buFont typeface="Arial" pitchFamily="34" charset="0"/>
+        <a:buFont typeface="Arial"/>
         <a:buChar char="•"/>
-        <a:defRPr sz="2000" kern="1200">
+        <a:defRPr sz="2000">
           <a:solidFill>
             <a:schemeClr val="tx1"/>
           </a:solidFill>
@@ -2002,8 +1810,8 @@
       <a:defPPr>
         <a:defRPr lang="en-US"/>
       </a:defPPr>
-      <a:lvl1pPr marL="0" algn="l" defTabSz="914400" rtl="0" eaLnBrk="1" latinLnBrk="0" hangingPunct="1">
-        <a:defRPr sz="1800" kern="1200">
+      <a:lvl1pPr marL="0" algn="l" defTabSz="914400" rtl="0">
+        <a:defRPr sz="1800">
           <a:solidFill>
             <a:schemeClr val="tx1"/>
           </a:solidFill>
@@ -2012,8 +1820,8 @@
           <a:cs typeface="+mn-cs"/>
         </a:defRPr>
       </a:lvl1pPr>
-      <a:lvl2pPr marL="457200" algn="l" defTabSz="914400" rtl="0" eaLnBrk="1" latinLnBrk="0" hangingPunct="1">
-        <a:defRPr sz="1800" kern="1200">
+      <a:lvl2pPr marL="457200" algn="l" defTabSz="914400" rtl="0">
+        <a:defRPr sz="1800">
           <a:solidFill>
             <a:schemeClr val="tx1"/>
           </a:solidFill>
@@ -2022,8 +1830,8 @@
           <a:cs typeface="+mn-cs"/>
         </a:defRPr>
       </a:lvl2pPr>
-      <a:lvl3pPr marL="914400" algn="l" defTabSz="914400" rtl="0" eaLnBrk="1" latinLnBrk="0" hangingPunct="1">
-        <a:defRPr sz="1800" kern="1200">
+      <a:lvl3pPr marL="914400" algn="l" defTabSz="914400" rtl="0">
+        <a:defRPr sz="1800">
           <a:solidFill>
             <a:schemeClr val="tx1"/>
           </a:solidFill>
@@ -2032,8 +1840,8 @@
           <a:cs typeface="+mn-cs"/>
         </a:defRPr>
       </a:lvl3pPr>
-      <a:lvl4pPr marL="1371600" algn="l" defTabSz="914400" rtl="0" eaLnBrk="1" latinLnBrk="0" hangingPunct="1">
-        <a:defRPr sz="1800" kern="1200">
+      <a:lvl4pPr marL="1371600" algn="l" defTabSz="914400" rtl="0">
+        <a:defRPr sz="1800">
           <a:solidFill>
             <a:schemeClr val="tx1"/>
           </a:solidFill>
@@ -2042,8 +1850,8 @@
           <a:cs typeface="+mn-cs"/>
         </a:defRPr>
       </a:lvl4pPr>
-      <a:lvl5pPr marL="1828800" algn="l" defTabSz="914400" rtl="0" eaLnBrk="1" latinLnBrk="0" hangingPunct="1">
-        <a:defRPr sz="1800" kern="1200">
+      <a:lvl5pPr marL="1828800" algn="l" defTabSz="914400" rtl="0">
+        <a:defRPr sz="1800">
           <a:solidFill>
             <a:schemeClr val="tx1"/>
           </a:solidFill>
@@ -2052,8 +1860,8 @@
           <a:cs typeface="+mn-cs"/>
         </a:defRPr>
       </a:lvl5pPr>
-      <a:lvl6pPr marL="2286000" algn="l" defTabSz="914400" rtl="0" eaLnBrk="1" latinLnBrk="0" hangingPunct="1">
-        <a:defRPr sz="1800" kern="1200">
+      <a:lvl6pPr marL="2286000" algn="l" defTabSz="914400" rtl="0">
+        <a:defRPr sz="1800">
           <a:solidFill>
             <a:schemeClr val="tx1"/>
           </a:solidFill>
@@ -2062,8 +1870,8 @@
           <a:cs typeface="+mn-cs"/>
         </a:defRPr>
       </a:lvl6pPr>
-      <a:lvl7pPr marL="2743200" algn="l" defTabSz="914400" rtl="0" eaLnBrk="1" latinLnBrk="0" hangingPunct="1">
-        <a:defRPr sz="1800" kern="1200">
+      <a:lvl7pPr marL="2743200" algn="l" defTabSz="914400" rtl="0">
+        <a:defRPr sz="1800">
           <a:solidFill>
             <a:schemeClr val="tx1"/>
           </a:solidFill>
@@ -2072,8 +1880,8 @@
           <a:cs typeface="+mn-cs"/>
         </a:defRPr>
       </a:lvl7pPr>
-      <a:lvl8pPr marL="3200400" algn="l" defTabSz="914400" rtl="0" eaLnBrk="1" latinLnBrk="0" hangingPunct="1">
-        <a:defRPr sz="1800" kern="1200">
+      <a:lvl8pPr marL="3200400" algn="l" defTabSz="914400" rtl="0">
+        <a:defRPr sz="1800">
           <a:solidFill>
             <a:schemeClr val="tx1"/>
           </a:solidFill>
@@ -2082,8 +1890,8 @@
           <a:cs typeface="+mn-cs"/>
         </a:defRPr>
       </a:lvl8pPr>
-      <a:lvl9pPr marL="3657600" algn="l" defTabSz="914400" rtl="0" eaLnBrk="1" latinLnBrk="0" hangingPunct="1">
-        <a:defRPr sz="1800" kern="1200">
+      <a:lvl9pPr marL="3657600" algn="l" defTabSz="914400" rtl="0">
+        <a:defRPr sz="1800">
           <a:solidFill>
             <a:schemeClr val="tx1"/>
           </a:solidFill>
@@ -2098,20 +1906,16 @@
 </file>
 
 <file path=ppt/slides/slide1.xml><?xml version="1.0" encoding="utf-8"?>
-<p:sld xmlns:a="http://schemas.openxmlformats.org/drawingml/2006/main" xmlns:r="http://schemas.openxmlformats.org/officeDocument/2006/relationships" xmlns:p="http://schemas.openxmlformats.org/presentationml/2006/main">
+<p:sld xmlns:a="http://schemas.openxmlformats.org/drawingml/2006/main" xmlns:r="http://schemas.openxmlformats.org/officeDocument/2006/relationships" xmlns:p="http://schemas.openxmlformats.org/presentationml/2006/main" xmlns:m="http://schemas.openxmlformats.org/officeDocument/2006/math" xmlns:w="http://schemas.openxmlformats.org/wordprocessingml/2006/main" xmlns:mc="http://schemas.openxmlformats.org/markup-compatibility/2006" showMasterPhAnim="0" showMasterSp="1" show="1">
   <p:cSld name="Slide 1">
     <p:bg>
-      <p:bgPr>
-        <a:blipFill dpi="0" rotWithShape="1">
-          <a:blip r:embed="rId1">
+      <p:bgPr shadeToTitle="0">
+        <a:blipFill rotWithShape="1">
+          <a:blip r:embed="rId3">
             <a:lum/>
           </a:blip>
-          <a:srcRect/>
-          <a:stretch>
-            <a:fillRect/>
-          </a:stretch>
+          <a:stretch/>
         </a:blipFill>
-        <a:effectLst/>
       </p:bgPr>
     </p:bg>
     <p:spTree>
@@ -2120,7 +1924,7 @@
         <p:cNvGrpSpPr/>
         <p:nvPr/>
       </p:nvGrpSpPr>
-      <p:grpSpPr>
+      <p:grpSpPr bwMode="auto">
         <a:xfrm>
           <a:off x="0" y="0"/>
           <a:ext cx="0" cy="0"/>
@@ -2133,24 +1937,28 @@
   <p:clrMapOvr>
     <a:masterClrMapping/>
   </p:clrMapOvr>
+  <mc:AlternateContent xmlns:mc="http://schemas.openxmlformats.org/markup-compatibility/2006">
+    <mc:Choice xmlns:p159="http://schemas.microsoft.com/office/powerpoint/2015/09/main" xmlns:p14="http://schemas.microsoft.com/office/powerpoint/2010/main" Requires="p159">
+      <p:transition p14:dur="500" advClick="1"/>
+    </mc:Choice>
+    <mc:Fallback>
+      <p:transition advClick="1"/>
+    </mc:Fallback>
+  </mc:AlternateContent>
 </p:sld>
 </file>
 
 <file path=ppt/slides/slide10.xml><?xml version="1.0" encoding="utf-8"?>
-<p:sld xmlns:a="http://schemas.openxmlformats.org/drawingml/2006/main" xmlns:r="http://schemas.openxmlformats.org/officeDocument/2006/relationships" xmlns:p="http://schemas.openxmlformats.org/presentationml/2006/main">
+<p:sld xmlns:a="http://schemas.openxmlformats.org/drawingml/2006/main" xmlns:r="http://schemas.openxmlformats.org/officeDocument/2006/relationships" xmlns:p="http://schemas.openxmlformats.org/presentationml/2006/main" xmlns:m="http://schemas.openxmlformats.org/officeDocument/2006/math" xmlns:w="http://schemas.openxmlformats.org/wordprocessingml/2006/main" xmlns:mc="http://schemas.openxmlformats.org/markup-compatibility/2006" showMasterPhAnim="0" showMasterSp="1" show="1">
   <p:cSld name="Slide 10">
     <p:bg>
-      <p:bgPr>
-        <a:blipFill dpi="0" rotWithShape="1">
-          <a:blip r:embed="rId1">
+      <p:bgPr shadeToTitle="0">
+        <a:blipFill rotWithShape="1">
+          <a:blip r:embed="rId3">
             <a:lum/>
           </a:blip>
-          <a:srcRect/>
-          <a:stretch>
-            <a:fillRect/>
-          </a:stretch>
+          <a:stretch/>
         </a:blipFill>
-        <a:effectLst/>
       </p:bgPr>
     </p:bg>
     <p:spTree>
@@ -2159,7 +1967,7 @@
         <p:cNvGrpSpPr/>
         <p:nvPr/>
       </p:nvGrpSpPr>
-      <p:grpSpPr>
+      <p:grpSpPr bwMode="auto">
         <a:xfrm>
           <a:off x="0" y="0"/>
           <a:ext cx="0" cy="0"/>
@@ -2172,24 +1980,28 @@
   <p:clrMapOvr>
     <a:masterClrMapping/>
   </p:clrMapOvr>
+  <mc:AlternateContent xmlns:mc="http://schemas.openxmlformats.org/markup-compatibility/2006">
+    <mc:Choice xmlns:p159="http://schemas.microsoft.com/office/powerpoint/2015/09/main" xmlns:p14="http://schemas.microsoft.com/office/powerpoint/2010/main" Requires="p159">
+      <p:transition p14:dur="500" advClick="1"/>
+    </mc:Choice>
+    <mc:Fallback>
+      <p:transition advClick="1"/>
+    </mc:Fallback>
+  </mc:AlternateContent>
 </p:sld>
 </file>
 
 <file path=ppt/slides/slide11.xml><?xml version="1.0" encoding="utf-8"?>
-<p:sld xmlns:a="http://schemas.openxmlformats.org/drawingml/2006/main" xmlns:r="http://schemas.openxmlformats.org/officeDocument/2006/relationships" xmlns:p="http://schemas.openxmlformats.org/presentationml/2006/main">
+<p:sld xmlns:a="http://schemas.openxmlformats.org/drawingml/2006/main" xmlns:r="http://schemas.openxmlformats.org/officeDocument/2006/relationships" xmlns:p="http://schemas.openxmlformats.org/presentationml/2006/main" xmlns:m="http://schemas.openxmlformats.org/officeDocument/2006/math" xmlns:w="http://schemas.openxmlformats.org/wordprocessingml/2006/main" xmlns:mc="http://schemas.openxmlformats.org/markup-compatibility/2006" showMasterPhAnim="0" showMasterSp="1" show="1">
   <p:cSld name="Slide 11">
     <p:bg>
-      <p:bgPr>
-        <a:blipFill dpi="0" rotWithShape="1">
-          <a:blip r:embed="rId1">
+      <p:bgPr shadeToTitle="0">
+        <a:blipFill rotWithShape="1">
+          <a:blip r:embed="rId3">
             <a:lum/>
           </a:blip>
-          <a:srcRect/>
-          <a:stretch>
-            <a:fillRect/>
-          </a:stretch>
+          <a:stretch/>
         </a:blipFill>
-        <a:effectLst/>
       </p:bgPr>
     </p:bg>
     <p:spTree>
@@ -2198,7 +2010,7 @@
         <p:cNvGrpSpPr/>
         <p:nvPr/>
       </p:nvGrpSpPr>
-      <p:grpSpPr>
+      <p:grpSpPr bwMode="auto">
         <a:xfrm>
           <a:off x="0" y="0"/>
           <a:ext cx="0" cy="0"/>
@@ -2211,24 +2023,28 @@
   <p:clrMapOvr>
     <a:masterClrMapping/>
   </p:clrMapOvr>
+  <mc:AlternateContent xmlns:mc="http://schemas.openxmlformats.org/markup-compatibility/2006">
+    <mc:Choice xmlns:p159="http://schemas.microsoft.com/office/powerpoint/2015/09/main" xmlns:p14="http://schemas.microsoft.com/office/powerpoint/2010/main" Requires="p159">
+      <p:transition p14:dur="500" advClick="1"/>
+    </mc:Choice>
+    <mc:Fallback>
+      <p:transition advClick="1"/>
+    </mc:Fallback>
+  </mc:AlternateContent>
 </p:sld>
 </file>
 
 <file path=ppt/slides/slide12.xml><?xml version="1.0" encoding="utf-8"?>
-<p:sld xmlns:a="http://schemas.openxmlformats.org/drawingml/2006/main" xmlns:r="http://schemas.openxmlformats.org/officeDocument/2006/relationships" xmlns:p="http://schemas.openxmlformats.org/presentationml/2006/main">
-  <p:cSld name="Slide 12">
+<p:sld xmlns:a="http://schemas.openxmlformats.org/drawingml/2006/main" xmlns:r="http://schemas.openxmlformats.org/officeDocument/2006/relationships" xmlns:p="http://schemas.openxmlformats.org/presentationml/2006/main" xmlns:m="http://schemas.openxmlformats.org/officeDocument/2006/math" xmlns:w="http://schemas.openxmlformats.org/wordprocessingml/2006/main" xmlns:mc="http://schemas.openxmlformats.org/markup-compatibility/2006" showMasterPhAnim="0" showMasterSp="1" show="1">
+  <p:cSld name="Slide 13">
     <p:bg>
-      <p:bgPr>
-        <a:blipFill dpi="0" rotWithShape="1">
-          <a:blip r:embed="rId1">
+      <p:bgPr shadeToTitle="0">
+        <a:blipFill rotWithShape="1">
+          <a:blip r:embed="rId3">
             <a:lum/>
           </a:blip>
-          <a:srcRect/>
-          <a:stretch>
-            <a:fillRect/>
-          </a:stretch>
+          <a:stretch/>
         </a:blipFill>
-        <a:effectLst/>
       </p:bgPr>
     </p:bg>
     <p:spTree>
@@ -2237,7 +2053,7 @@
         <p:cNvGrpSpPr/>
         <p:nvPr/>
       </p:nvGrpSpPr>
-      <p:grpSpPr>
+      <p:grpSpPr bwMode="auto">
         <a:xfrm>
           <a:off x="0" y="0"/>
           <a:ext cx="0" cy="0"/>
@@ -2250,24 +2066,28 @@
   <p:clrMapOvr>
     <a:masterClrMapping/>
   </p:clrMapOvr>
+  <mc:AlternateContent xmlns:mc="http://schemas.openxmlformats.org/markup-compatibility/2006">
+    <mc:Choice xmlns:p159="http://schemas.microsoft.com/office/powerpoint/2015/09/main" xmlns:p14="http://schemas.microsoft.com/office/powerpoint/2010/main" Requires="p159">
+      <p:transition p14:dur="500" advClick="1"/>
+    </mc:Choice>
+    <mc:Fallback>
+      <p:transition advClick="1"/>
+    </mc:Fallback>
+  </mc:AlternateContent>
 </p:sld>
 </file>
 
 <file path=ppt/slides/slide13.xml><?xml version="1.0" encoding="utf-8"?>
-<p:sld xmlns:a="http://schemas.openxmlformats.org/drawingml/2006/main" xmlns:r="http://schemas.openxmlformats.org/officeDocument/2006/relationships" xmlns:p="http://schemas.openxmlformats.org/presentationml/2006/main">
-  <p:cSld name="Slide 13">
+<p:sld xmlns:a="http://schemas.openxmlformats.org/drawingml/2006/main" xmlns:r="http://schemas.openxmlformats.org/officeDocument/2006/relationships" xmlns:p="http://schemas.openxmlformats.org/presentationml/2006/main" xmlns:m="http://schemas.openxmlformats.org/officeDocument/2006/math" xmlns:w="http://schemas.openxmlformats.org/wordprocessingml/2006/main" xmlns:mc="http://schemas.openxmlformats.org/markup-compatibility/2006" showMasterPhAnim="0" showMasterSp="1" show="1">
+  <p:cSld name="Slide 14">
     <p:bg>
-      <p:bgPr>
-        <a:blipFill dpi="0" rotWithShape="1">
-          <a:blip r:embed="rId1">
+      <p:bgPr shadeToTitle="0">
+        <a:blipFill rotWithShape="1">
+          <a:blip r:embed="rId3">
             <a:lum/>
           </a:blip>
-          <a:srcRect/>
-          <a:stretch>
-            <a:fillRect/>
-          </a:stretch>
+          <a:stretch/>
         </a:blipFill>
-        <a:effectLst/>
       </p:bgPr>
     </p:bg>
     <p:spTree>
@@ -2276,7 +2096,7 @@
         <p:cNvGrpSpPr/>
         <p:nvPr/>
       </p:nvGrpSpPr>
-      <p:grpSpPr>
+      <p:grpSpPr bwMode="auto">
         <a:xfrm>
           <a:off x="0" y="0"/>
           <a:ext cx="0" cy="0"/>
@@ -2289,24 +2109,28 @@
   <p:clrMapOvr>
     <a:masterClrMapping/>
   </p:clrMapOvr>
+  <mc:AlternateContent xmlns:mc="http://schemas.openxmlformats.org/markup-compatibility/2006">
+    <mc:Choice xmlns:p159="http://schemas.microsoft.com/office/powerpoint/2015/09/main" xmlns:p14="http://schemas.microsoft.com/office/powerpoint/2010/main" Requires="p159">
+      <p:transition p14:dur="500" advClick="1"/>
+    </mc:Choice>
+    <mc:Fallback>
+      <p:transition advClick="1"/>
+    </mc:Fallback>
+  </mc:AlternateContent>
 </p:sld>
 </file>
 
-<file path=ppt/slides/slide14.xml><?xml version="1.0" encoding="utf-8"?>
-<p:sld xmlns:a="http://schemas.openxmlformats.org/drawingml/2006/main" xmlns:r="http://schemas.openxmlformats.org/officeDocument/2006/relationships" xmlns:p="http://schemas.openxmlformats.org/presentationml/2006/main">
-  <p:cSld name="Slide 14">
+<file path=ppt/slides/slide2.xml><?xml version="1.0" encoding="utf-8"?>
+<p:sld xmlns:a="http://schemas.openxmlformats.org/drawingml/2006/main" xmlns:r="http://schemas.openxmlformats.org/officeDocument/2006/relationships" xmlns:p="http://schemas.openxmlformats.org/presentationml/2006/main" xmlns:m="http://schemas.openxmlformats.org/officeDocument/2006/math" xmlns:w="http://schemas.openxmlformats.org/wordprocessingml/2006/main" xmlns:mc="http://schemas.openxmlformats.org/markup-compatibility/2006" showMasterPhAnim="0" showMasterSp="1" show="1">
+  <p:cSld name="Slide 2">
     <p:bg>
-      <p:bgPr>
-        <a:blipFill dpi="0" rotWithShape="1">
-          <a:blip r:embed="rId1">
+      <p:bgPr shadeToTitle="0">
+        <a:blipFill rotWithShape="1">
+          <a:blip r:embed="rId3">
             <a:lum/>
           </a:blip>
-          <a:srcRect/>
-          <a:stretch>
-            <a:fillRect/>
-          </a:stretch>
+          <a:stretch/>
         </a:blipFill>
-        <a:effectLst/>
       </p:bgPr>
     </p:bg>
     <p:spTree>
@@ -2315,7 +2139,7 @@
         <p:cNvGrpSpPr/>
         <p:nvPr/>
       </p:nvGrpSpPr>
-      <p:grpSpPr>
+      <p:grpSpPr bwMode="auto">
         <a:xfrm>
           <a:off x="0" y="0"/>
           <a:ext cx="0" cy="0"/>
@@ -2328,24 +2152,28 @@
   <p:clrMapOvr>
     <a:masterClrMapping/>
   </p:clrMapOvr>
+  <mc:AlternateContent xmlns:mc="http://schemas.openxmlformats.org/markup-compatibility/2006">
+    <mc:Choice xmlns:p159="http://schemas.microsoft.com/office/powerpoint/2015/09/main" xmlns:p14="http://schemas.microsoft.com/office/powerpoint/2010/main" Requires="p159">
+      <p:transition p14:dur="500" advClick="1"/>
+    </mc:Choice>
+    <mc:Fallback>
+      <p:transition advClick="1"/>
+    </mc:Fallback>
+  </mc:AlternateContent>
 </p:sld>
 </file>
 
-<file path=ppt/slides/slide15.xml><?xml version="1.0" encoding="utf-8"?>
-<p:sld xmlns:a="http://schemas.openxmlformats.org/drawingml/2006/main" xmlns:r="http://schemas.openxmlformats.org/officeDocument/2006/relationships" xmlns:p="http://schemas.openxmlformats.org/presentationml/2006/main">
-  <p:cSld name="Slide 15">
+<file path=ppt/slides/slide3.xml><?xml version="1.0" encoding="utf-8"?>
+<p:sld xmlns:a="http://schemas.openxmlformats.org/drawingml/2006/main" xmlns:r="http://schemas.openxmlformats.org/officeDocument/2006/relationships" xmlns:p="http://schemas.openxmlformats.org/presentationml/2006/main" xmlns:m="http://schemas.openxmlformats.org/officeDocument/2006/math" xmlns:w="http://schemas.openxmlformats.org/wordprocessingml/2006/main" xmlns:mc="http://schemas.openxmlformats.org/markup-compatibility/2006" showMasterPhAnim="0" showMasterSp="1" show="1">
+  <p:cSld name="Slide 3">
     <p:bg>
-      <p:bgPr>
-        <a:blipFill dpi="0" rotWithShape="1">
-          <a:blip r:embed="rId1">
+      <p:bgPr shadeToTitle="0">
+        <a:blipFill rotWithShape="1">
+          <a:blip r:embed="rId3">
             <a:lum/>
           </a:blip>
-          <a:srcRect/>
-          <a:stretch>
-            <a:fillRect/>
-          </a:stretch>
+          <a:stretch/>
         </a:blipFill>
-        <a:effectLst/>
       </p:bgPr>
     </p:bg>
     <p:spTree>
@@ -2354,7 +2182,7 @@
         <p:cNvGrpSpPr/>
         <p:nvPr/>
       </p:nvGrpSpPr>
-      <p:grpSpPr>
+      <p:grpSpPr bwMode="auto">
         <a:xfrm>
           <a:off x="0" y="0"/>
           <a:ext cx="0" cy="0"/>
@@ -2367,24 +2195,28 @@
   <p:clrMapOvr>
     <a:masterClrMapping/>
   </p:clrMapOvr>
+  <mc:AlternateContent xmlns:mc="http://schemas.openxmlformats.org/markup-compatibility/2006">
+    <mc:Choice xmlns:p159="http://schemas.microsoft.com/office/powerpoint/2015/09/main" xmlns:p14="http://schemas.microsoft.com/office/powerpoint/2010/main" Requires="p159">
+      <p:transition p14:dur="500" advClick="1"/>
+    </mc:Choice>
+    <mc:Fallback>
+      <p:transition advClick="1"/>
+    </mc:Fallback>
+  </mc:AlternateContent>
 </p:sld>
 </file>
 
-<file path=ppt/slides/slide2.xml><?xml version="1.0" encoding="utf-8"?>
-<p:sld xmlns:a="http://schemas.openxmlformats.org/drawingml/2006/main" xmlns:r="http://schemas.openxmlformats.org/officeDocument/2006/relationships" xmlns:p="http://schemas.openxmlformats.org/presentationml/2006/main">
-  <p:cSld name="Slide 2">
+<file path=ppt/slides/slide4.xml><?xml version="1.0" encoding="utf-8"?>
+<p:sld xmlns:a="http://schemas.openxmlformats.org/drawingml/2006/main" xmlns:r="http://schemas.openxmlformats.org/officeDocument/2006/relationships" xmlns:p="http://schemas.openxmlformats.org/presentationml/2006/main" xmlns:m="http://schemas.openxmlformats.org/officeDocument/2006/math" xmlns:w="http://schemas.openxmlformats.org/wordprocessingml/2006/main" xmlns:mc="http://schemas.openxmlformats.org/markup-compatibility/2006" showMasterPhAnim="0" showMasterSp="1" show="1">
+  <p:cSld name="Slide 4">
     <p:bg>
-      <p:bgPr>
-        <a:blipFill dpi="0" rotWithShape="1">
-          <a:blip r:embed="rId1">
+      <p:bgPr shadeToTitle="0">
+        <a:blipFill rotWithShape="1">
+          <a:blip r:embed="rId3">
             <a:lum/>
           </a:blip>
-          <a:srcRect/>
-          <a:stretch>
-            <a:fillRect/>
-          </a:stretch>
+          <a:stretch/>
         </a:blipFill>
-        <a:effectLst/>
       </p:bgPr>
     </p:bg>
     <p:spTree>
@@ -2393,7 +2225,7 @@
         <p:cNvGrpSpPr/>
         <p:nvPr/>
       </p:nvGrpSpPr>
-      <p:grpSpPr>
+      <p:grpSpPr bwMode="auto">
         <a:xfrm>
           <a:off x="0" y="0"/>
           <a:ext cx="0" cy="0"/>
@@ -2406,24 +2238,28 @@
   <p:clrMapOvr>
     <a:masterClrMapping/>
   </p:clrMapOvr>
+  <mc:AlternateContent xmlns:mc="http://schemas.openxmlformats.org/markup-compatibility/2006">
+    <mc:Choice xmlns:p159="http://schemas.microsoft.com/office/powerpoint/2015/09/main" xmlns:p14="http://schemas.microsoft.com/office/powerpoint/2010/main" Requires="p159">
+      <p:transition p14:dur="500" advClick="1"/>
+    </mc:Choice>
+    <mc:Fallback>
+      <p:transition advClick="1"/>
+    </mc:Fallback>
+  </mc:AlternateContent>
 </p:sld>
 </file>
 
-<file path=ppt/slides/slide3.xml><?xml version="1.0" encoding="utf-8"?>
-<p:sld xmlns:a="http://schemas.openxmlformats.org/drawingml/2006/main" xmlns:r="http://schemas.openxmlformats.org/officeDocument/2006/relationships" xmlns:p="http://schemas.openxmlformats.org/presentationml/2006/main">
-  <p:cSld name="Slide 3">
+<file path=ppt/slides/slide5.xml><?xml version="1.0" encoding="utf-8"?>
+<p:sld xmlns:a="http://schemas.openxmlformats.org/drawingml/2006/main" xmlns:r="http://schemas.openxmlformats.org/officeDocument/2006/relationships" xmlns:p="http://schemas.openxmlformats.org/presentationml/2006/main" xmlns:m="http://schemas.openxmlformats.org/officeDocument/2006/math" xmlns:w="http://schemas.openxmlformats.org/wordprocessingml/2006/main" xmlns:mc="http://schemas.openxmlformats.org/markup-compatibility/2006" showMasterPhAnim="0" showMasterSp="1" show="1">
+  <p:cSld name="Slide 5">
     <p:bg>
-      <p:bgPr>
-        <a:blipFill dpi="0" rotWithShape="1">
-          <a:blip r:embed="rId1">
+      <p:bgPr shadeToTitle="0">
+        <a:blipFill rotWithShape="1">
+          <a:blip r:embed="rId3">
             <a:lum/>
           </a:blip>
-          <a:srcRect/>
-          <a:stretch>
-            <a:fillRect/>
-          </a:stretch>
+          <a:stretch/>
         </a:blipFill>
-        <a:effectLst/>
       </p:bgPr>
     </p:bg>
     <p:spTree>
@@ -2432,7 +2268,7 @@
         <p:cNvGrpSpPr/>
         <p:nvPr/>
       </p:nvGrpSpPr>
-      <p:grpSpPr>
+      <p:grpSpPr bwMode="auto">
         <a:xfrm>
           <a:off x="0" y="0"/>
           <a:ext cx="0" cy="0"/>
@@ -2445,24 +2281,28 @@
   <p:clrMapOvr>
     <a:masterClrMapping/>
   </p:clrMapOvr>
+  <mc:AlternateContent xmlns:mc="http://schemas.openxmlformats.org/markup-compatibility/2006">
+    <mc:Choice xmlns:p159="http://schemas.microsoft.com/office/powerpoint/2015/09/main" xmlns:p14="http://schemas.microsoft.com/office/powerpoint/2010/main" Requires="p159">
+      <p:transition p14:dur="500" advClick="1"/>
+    </mc:Choice>
+    <mc:Fallback>
+      <p:transition advClick="1"/>
+    </mc:Fallback>
+  </mc:AlternateContent>
 </p:sld>
 </file>
 
-<file path=ppt/slides/slide4.xml><?xml version="1.0" encoding="utf-8"?>
-<p:sld xmlns:a="http://schemas.openxmlformats.org/drawingml/2006/main" xmlns:r="http://schemas.openxmlformats.org/officeDocument/2006/relationships" xmlns:p="http://schemas.openxmlformats.org/presentationml/2006/main">
-  <p:cSld name="Slide 4">
+<file path=ppt/slides/slide6.xml><?xml version="1.0" encoding="utf-8"?>
+<p:sld xmlns:a="http://schemas.openxmlformats.org/drawingml/2006/main" xmlns:r="http://schemas.openxmlformats.org/officeDocument/2006/relationships" xmlns:p="http://schemas.openxmlformats.org/presentationml/2006/main" xmlns:m="http://schemas.openxmlformats.org/officeDocument/2006/math" xmlns:w="http://schemas.openxmlformats.org/wordprocessingml/2006/main" xmlns:mc="http://schemas.openxmlformats.org/markup-compatibility/2006" showMasterPhAnim="0" showMasterSp="1" show="1">
+  <p:cSld name="Slide 6">
     <p:bg>
-      <p:bgPr>
-        <a:blipFill dpi="0" rotWithShape="1">
-          <a:blip r:embed="rId1">
+      <p:bgPr shadeToTitle="0">
+        <a:blipFill rotWithShape="1">
+          <a:blip r:embed="rId3">
             <a:lum/>
           </a:blip>
-          <a:srcRect/>
-          <a:stretch>
-            <a:fillRect/>
-          </a:stretch>
+          <a:stretch/>
         </a:blipFill>
-        <a:effectLst/>
       </p:bgPr>
     </p:bg>
     <p:spTree>
@@ -2471,7 +2311,7 @@
         <p:cNvGrpSpPr/>
         <p:nvPr/>
       </p:nvGrpSpPr>
-      <p:grpSpPr>
+      <p:grpSpPr bwMode="auto">
         <a:xfrm>
           <a:off x="0" y="0"/>
           <a:ext cx="0" cy="0"/>
@@ -2484,24 +2324,28 @@
   <p:clrMapOvr>
     <a:masterClrMapping/>
   </p:clrMapOvr>
+  <mc:AlternateContent xmlns:mc="http://schemas.openxmlformats.org/markup-compatibility/2006">
+    <mc:Choice xmlns:p159="http://schemas.microsoft.com/office/powerpoint/2015/09/main" xmlns:p14="http://schemas.microsoft.com/office/powerpoint/2010/main" Requires="p159">
+      <p:transition p14:dur="500" advClick="1"/>
+    </mc:Choice>
+    <mc:Fallback>
+      <p:transition advClick="1"/>
+    </mc:Fallback>
+  </mc:AlternateContent>
 </p:sld>
 </file>
 
-<file path=ppt/slides/slide5.xml><?xml version="1.0" encoding="utf-8"?>
-<p:sld xmlns:a="http://schemas.openxmlformats.org/drawingml/2006/main" xmlns:r="http://schemas.openxmlformats.org/officeDocument/2006/relationships" xmlns:p="http://schemas.openxmlformats.org/presentationml/2006/main">
-  <p:cSld name="Slide 5">
+<file path=ppt/slides/slide7.xml><?xml version="1.0" encoding="utf-8"?>
+<p:sld xmlns:a="http://schemas.openxmlformats.org/drawingml/2006/main" xmlns:r="http://schemas.openxmlformats.org/officeDocument/2006/relationships" xmlns:p="http://schemas.openxmlformats.org/presentationml/2006/main" xmlns:m="http://schemas.openxmlformats.org/officeDocument/2006/math" xmlns:w="http://schemas.openxmlformats.org/wordprocessingml/2006/main" xmlns:mc="http://schemas.openxmlformats.org/markup-compatibility/2006" showMasterPhAnim="0" showMasterSp="1" show="1">
+  <p:cSld name="Slide 7">
     <p:bg>
-      <p:bgPr>
-        <a:blipFill dpi="0" rotWithShape="1">
-          <a:blip r:embed="rId1">
+      <p:bgPr shadeToTitle="0">
+        <a:blipFill rotWithShape="1">
+          <a:blip r:embed="rId3">
             <a:lum/>
           </a:blip>
-          <a:srcRect/>
-          <a:stretch>
-            <a:fillRect/>
-          </a:stretch>
+          <a:stretch/>
         </a:blipFill>
-        <a:effectLst/>
       </p:bgPr>
     </p:bg>
     <p:spTree>
@@ -2510,7 +2354,7 @@
         <p:cNvGrpSpPr/>
         <p:nvPr/>
       </p:nvGrpSpPr>
-      <p:grpSpPr>
+      <p:grpSpPr bwMode="auto">
         <a:xfrm>
           <a:off x="0" y="0"/>
           <a:ext cx="0" cy="0"/>
@@ -2523,24 +2367,28 @@
   <p:clrMapOvr>
     <a:masterClrMapping/>
   </p:clrMapOvr>
+  <mc:AlternateContent xmlns:mc="http://schemas.openxmlformats.org/markup-compatibility/2006">
+    <mc:Choice xmlns:p159="http://schemas.microsoft.com/office/powerpoint/2015/09/main" xmlns:p14="http://schemas.microsoft.com/office/powerpoint/2010/main" Requires="p159">
+      <p:transition p14:dur="500" advClick="1"/>
+    </mc:Choice>
+    <mc:Fallback>
+      <p:transition advClick="1"/>
+    </mc:Fallback>
+  </mc:AlternateContent>
 </p:sld>
 </file>
 
-<file path=ppt/slides/slide6.xml><?xml version="1.0" encoding="utf-8"?>
-<p:sld xmlns:a="http://schemas.openxmlformats.org/drawingml/2006/main" xmlns:r="http://schemas.openxmlformats.org/officeDocument/2006/relationships" xmlns:p="http://schemas.openxmlformats.org/presentationml/2006/main">
-  <p:cSld name="Slide 6">
+<file path=ppt/slides/slide8.xml><?xml version="1.0" encoding="utf-8"?>
+<p:sld xmlns:a="http://schemas.openxmlformats.org/drawingml/2006/main" xmlns:r="http://schemas.openxmlformats.org/officeDocument/2006/relationships" xmlns:p="http://schemas.openxmlformats.org/presentationml/2006/main" xmlns:m="http://schemas.openxmlformats.org/officeDocument/2006/math" xmlns:w="http://schemas.openxmlformats.org/wordprocessingml/2006/main" xmlns:mc="http://schemas.openxmlformats.org/markup-compatibility/2006" showMasterPhAnim="0" showMasterSp="1" show="1">
+  <p:cSld name="Slide 8">
     <p:bg>
-      <p:bgPr>
-        <a:blipFill dpi="0" rotWithShape="1">
-          <a:blip r:embed="rId1">
+      <p:bgPr shadeToTitle="0">
+        <a:blipFill rotWithShape="1">
+          <a:blip r:embed="rId3">
             <a:lum/>
           </a:blip>
-          <a:srcRect/>
-          <a:stretch>
-            <a:fillRect/>
-          </a:stretch>
+          <a:stretch/>
         </a:blipFill>
-        <a:effectLst/>
       </p:bgPr>
     </p:bg>
     <p:spTree>
@@ -2549,7 +2397,7 @@
         <p:cNvGrpSpPr/>
         <p:nvPr/>
       </p:nvGrpSpPr>
-      <p:grpSpPr>
+      <p:grpSpPr bwMode="auto">
         <a:xfrm>
           <a:off x="0" y="0"/>
           <a:ext cx="0" cy="0"/>
@@ -2562,24 +2410,28 @@
   <p:clrMapOvr>
     <a:masterClrMapping/>
   </p:clrMapOvr>
+  <mc:AlternateContent xmlns:mc="http://schemas.openxmlformats.org/markup-compatibility/2006">
+    <mc:Choice xmlns:p159="http://schemas.microsoft.com/office/powerpoint/2015/09/main" xmlns:p14="http://schemas.microsoft.com/office/powerpoint/2010/main" Requires="p159">
+      <p:transition p14:dur="500" advClick="1"/>
+    </mc:Choice>
+    <mc:Fallback>
+      <p:transition advClick="1"/>
+    </mc:Fallback>
+  </mc:AlternateContent>
 </p:sld>
 </file>
 
-<file path=ppt/slides/slide7.xml><?xml version="1.0" encoding="utf-8"?>
-<p:sld xmlns:a="http://schemas.openxmlformats.org/drawingml/2006/main" xmlns:r="http://schemas.openxmlformats.org/officeDocument/2006/relationships" xmlns:p="http://schemas.openxmlformats.org/presentationml/2006/main">
-  <p:cSld name="Slide 7">
+<file path=ppt/slides/slide9.xml><?xml version="1.0" encoding="utf-8"?>
+<p:sld xmlns:a="http://schemas.openxmlformats.org/drawingml/2006/main" xmlns:r="http://schemas.openxmlformats.org/officeDocument/2006/relationships" xmlns:p="http://schemas.openxmlformats.org/presentationml/2006/main" xmlns:m="http://schemas.openxmlformats.org/officeDocument/2006/math" xmlns:w="http://schemas.openxmlformats.org/wordprocessingml/2006/main" xmlns:mc="http://schemas.openxmlformats.org/markup-compatibility/2006" showMasterPhAnim="0" showMasterSp="1" show="1">
+  <p:cSld name="Slide 9">
     <p:bg>
-      <p:bgPr>
-        <a:blipFill dpi="0" rotWithShape="1">
-          <a:blip r:embed="rId1">
+      <p:bgPr shadeToTitle="0">
+        <a:blipFill rotWithShape="1">
+          <a:blip r:embed="rId3">
             <a:lum/>
           </a:blip>
-          <a:srcRect/>
-          <a:stretch>
-            <a:fillRect/>
-          </a:stretch>
+          <a:stretch/>
         </a:blipFill>
-        <a:effectLst/>
       </p:bgPr>
     </p:bg>
     <p:spTree>
@@ -2588,7 +2440,7 @@
         <p:cNvGrpSpPr/>
         <p:nvPr/>
       </p:nvGrpSpPr>
-      <p:grpSpPr>
+      <p:grpSpPr bwMode="auto">
         <a:xfrm>
           <a:off x="0" y="0"/>
           <a:ext cx="0" cy="0"/>
@@ -2601,89 +2453,19 @@
   <p:clrMapOvr>
     <a:masterClrMapping/>
   </p:clrMapOvr>
+  <mc:AlternateContent xmlns:mc="http://schemas.openxmlformats.org/markup-compatibility/2006">
+    <mc:Choice xmlns:p159="http://schemas.microsoft.com/office/powerpoint/2015/09/main" xmlns:p14="http://schemas.microsoft.com/office/powerpoint/2010/main" Requires="p159">
+      <p:transition p14:dur="500" advClick="1"/>
+    </mc:Choice>
+    <mc:Fallback>
+      <p:transition advClick="1"/>
+    </mc:Fallback>
+  </mc:AlternateContent>
 </p:sld>
 </file>
 
-<file path=ppt/slides/slide8.xml><?xml version="1.0" encoding="utf-8"?>
-<p:sld xmlns:a="http://schemas.openxmlformats.org/drawingml/2006/main" xmlns:r="http://schemas.openxmlformats.org/officeDocument/2006/relationships" xmlns:p="http://schemas.openxmlformats.org/presentationml/2006/main">
-  <p:cSld name="Slide 8">
-    <p:bg>
-      <p:bgPr>
-        <a:blipFill dpi="0" rotWithShape="1">
-          <a:blip r:embed="rId1">
-            <a:lum/>
-          </a:blip>
-          <a:srcRect/>
-          <a:stretch>
-            <a:fillRect/>
-          </a:stretch>
-        </a:blipFill>
-        <a:effectLst/>
-      </p:bgPr>
-    </p:bg>
-    <p:spTree>
-      <p:nvGrpSpPr>
-        <p:cNvPr id="1" name=""/>
-        <p:cNvGrpSpPr/>
-        <p:nvPr/>
-      </p:nvGrpSpPr>
-      <p:grpSpPr>
-        <a:xfrm>
-          <a:off x="0" y="0"/>
-          <a:ext cx="0" cy="0"/>
-          <a:chOff x="0" y="0"/>
-          <a:chExt cx="0" cy="0"/>
-        </a:xfrm>
-      </p:grpSpPr>
-    </p:spTree>
-  </p:cSld>
-  <p:clrMapOvr>
-    <a:masterClrMapping/>
-  </p:clrMapOvr>
-</p:sld>
-</file>
-
-<file path=ppt/slides/slide9.xml><?xml version="1.0" encoding="utf-8"?>
-<p:sld xmlns:a="http://schemas.openxmlformats.org/drawingml/2006/main" xmlns:r="http://schemas.openxmlformats.org/officeDocument/2006/relationships" xmlns:p="http://schemas.openxmlformats.org/presentationml/2006/main">
-  <p:cSld name="Slide 9">
-    <p:bg>
-      <p:bgPr>
-        <a:blipFill dpi="0" rotWithShape="1">
-          <a:blip r:embed="rId1">
-            <a:lum/>
-          </a:blip>
-          <a:srcRect/>
-          <a:stretch>
-            <a:fillRect/>
-          </a:stretch>
-        </a:blipFill>
-        <a:effectLst/>
-      </p:bgPr>
-    </p:bg>
-    <p:spTree>
-      <p:nvGrpSpPr>
-        <p:cNvPr id="1" name=""/>
-        <p:cNvGrpSpPr/>
-        <p:nvPr/>
-      </p:nvGrpSpPr>
-      <p:grpSpPr>
-        <a:xfrm>
-          <a:off x="0" y="0"/>
-          <a:ext cx="0" cy="0"/>
-          <a:chOff x="0" y="0"/>
-          <a:chExt cx="0" cy="0"/>
-        </a:xfrm>
-      </p:grpSpPr>
-    </p:spTree>
-  </p:cSld>
-  <p:clrMapOvr>
-    <a:masterClrMapping/>
-  </p:clrMapOvr>
-</p:sld>
-</file>
-
 <file path=ppt/theme/theme1.xml><?xml version="1.0" encoding="utf-8"?>
-<a:theme xmlns:a="http://schemas.openxmlformats.org/drawingml/2006/main" name="Office Theme">
+<a:theme xmlns:a="http://schemas.openxmlformats.org/drawingml/2006/main" xmlns:r="http://schemas.openxmlformats.org/officeDocument/2006/relationships" xmlns:p="http://schemas.openxmlformats.org/presentationml/2006/main" name="Office Theme">
   <a:themeElements>
     <a:clrScheme name="Office">
       <a:dk1>
@@ -2725,108 +2507,14 @@
     </a:clrScheme>
     <a:fontScheme name="Office">
       <a:majorFont>
-        <a:latin typeface="Calibri Light" panose="020F0302020204030204"/>
-        <a:ea typeface=""/>
-        <a:cs typeface=""/>
-        <a:font script="Jpan" typeface="游ゴシック Light"/>
-        <a:font script="Hang" typeface="맑은 고딕"/>
-        <a:font script="Hans" typeface="等线 Light"/>
-        <a:font script="Hant" typeface="新細明體"/>
-        <a:font script="Arab" typeface="Times New Roman"/>
-        <a:font script="Hebr" typeface="Times New Roman"/>
-        <a:font script="Thai" typeface="Angsana New"/>
-        <a:font script="Ethi" typeface="Nyala"/>
-        <a:font script="Beng" typeface="Vrinda"/>
-        <a:font script="Gujr" typeface="Shruti"/>
-        <a:font script="Khmr" typeface="MoolBoran"/>
-        <a:font script="Knda" typeface="Tunga"/>
-        <a:font script="Guru" typeface="Raavi"/>
-        <a:font script="Cans" typeface="Euphemia"/>
-        <a:font script="Cher" typeface="Plantagenet Cherokee"/>
-        <a:font script="Yiii" typeface="Microsoft Yi Baiti"/>
-        <a:font script="Tibt" typeface="Microsoft Himalaya"/>
-        <a:font script="Thaa" typeface="MV Boli"/>
-        <a:font script="Deva" typeface="Mangal"/>
-        <a:font script="Telu" typeface="Gautami"/>
-        <a:font script="Taml" typeface="Latha"/>
-        <a:font script="Syrc" typeface="Estrangelo Edessa"/>
-        <a:font script="Orya" typeface="Kalinga"/>
-        <a:font script="Mlym" typeface="Kartika"/>
-        <a:font script="Laoo" typeface="DokChampa"/>
-        <a:font script="Sinh" typeface="Iskoola Pota"/>
-        <a:font script="Mong" typeface="Mongolian Baiti"/>
-        <a:font script="Viet" typeface="Times New Roman"/>
-        <a:font script="Uigh" typeface="Microsoft Uighur"/>
-        <a:font script="Geor" typeface="Sylfaen"/>
-        <a:font script="Armn" typeface="Arial"/>
-        <a:font script="Bugi" typeface="Leelawadee UI"/>
-        <a:font script="Bopo" typeface="Microsoft JhengHei"/>
-        <a:font script="Java" typeface="Javanese Text"/>
-        <a:font script="Lisu" typeface="Segoe UI"/>
-        <a:font script="Mymr" typeface="Myanmar Text"/>
-        <a:font script="Nkoo" typeface="Ebrima"/>
-        <a:font script="Olck" typeface="Nirmala UI"/>
-        <a:font script="Osma" typeface="Ebrima"/>
-        <a:font script="Phag" typeface="Phagspa"/>
-        <a:font script="Syrn" typeface="Estrangelo Edessa"/>
-        <a:font script="Syrj" typeface="Estrangelo Edessa"/>
-        <a:font script="Syre" typeface="Estrangelo Edessa"/>
-        <a:font script="Sora" typeface="Nirmala UI"/>
-        <a:font script="Tale" typeface="Microsoft Tai Le"/>
-        <a:font script="Talu" typeface="Microsoft New Tai Lue"/>
-        <a:font script="Tfng" typeface="Ebrima"/>
+        <a:latin typeface="Calibri Light"/>
+        <a:ea typeface="Arial"/>
+        <a:cs typeface="Arial"/>
       </a:majorFont>
       <a:minorFont>
-        <a:latin typeface="Calibri" panose="020F0502020204030204"/>
-        <a:ea typeface=""/>
-        <a:cs typeface=""/>
-        <a:font script="Jpan" typeface="游ゴシック"/>
-        <a:font script="Hang" typeface="맑은 고딕"/>
-        <a:font script="Hans" typeface="等线"/>
-        <a:font script="Hant" typeface="新細明體"/>
-        <a:font script="Arab" typeface="Arial"/>
-        <a:font script="Hebr" typeface="Arial"/>
-        <a:font script="Thai" typeface="Cordia New"/>
-        <a:font script="Ethi" typeface="Nyala"/>
-        <a:font script="Beng" typeface="Vrinda"/>
-        <a:font script="Gujr" typeface="Shruti"/>
-        <a:font script="Khmr" typeface="DaunPenh"/>
-        <a:font script="Knda" typeface="Tunga"/>
-        <a:font script="Guru" typeface="Raavi"/>
-        <a:font script="Cans" typeface="Euphemia"/>
-        <a:font script="Cher" typeface="Plantagenet Cherokee"/>
-        <a:font script="Yiii" typeface="Microsoft Yi Baiti"/>
-        <a:font script="Tibt" typeface="Microsoft Himalaya"/>
-        <a:font script="Thaa" typeface="MV Boli"/>
-        <a:font script="Deva" typeface="Mangal"/>
-        <a:font script="Telu" typeface="Gautami"/>
-        <a:font script="Taml" typeface="Latha"/>
-        <a:font script="Syrc" typeface="Estrangelo Edessa"/>
-        <a:font script="Orya" typeface="Kalinga"/>
-        <a:font script="Mlym" typeface="Kartika"/>
-        <a:font script="Laoo" typeface="DokChampa"/>
-        <a:font script="Sinh" typeface="Iskoola Pota"/>
-        <a:font script="Mong" typeface="Mongolian Baiti"/>
-        <a:font script="Viet" typeface="Arial"/>
-        <a:font script="Uigh" typeface="Microsoft Uighur"/>
-        <a:font script="Geor" typeface="Sylfaen"/>
-        <a:font script="Armn" typeface="Arial"/>
-        <a:font script="Bugi" typeface="Leelawadee UI"/>
-        <a:font script="Bopo" typeface="Microsoft JhengHei"/>
-        <a:font script="Java" typeface="Javanese Text"/>
-        <a:font script="Lisu" typeface="Segoe UI"/>
-        <a:font script="Mymr" typeface="Myanmar Text"/>
-        <a:font script="Nkoo" typeface="Ebrima"/>
-        <a:font script="Olck" typeface="Nirmala UI"/>
-        <a:font script="Osma" typeface="Ebrima"/>
-        <a:font script="Phag" typeface="Phagspa"/>
-        <a:font script="Syrn" typeface="Estrangelo Edessa"/>
-        <a:font script="Syrj" typeface="Estrangelo Edessa"/>
-        <a:font script="Syre" typeface="Estrangelo Edessa"/>
-        <a:font script="Sora" typeface="Nirmala UI"/>
-        <a:font script="Tale" typeface="Microsoft Tai Le"/>
-        <a:font script="Talu" typeface="Microsoft New Tai Lue"/>
-        <a:font script="Tfng" typeface="Ebrima"/>
+        <a:latin typeface="Calibri"/>
+        <a:ea typeface="Arial"/>
+        <a:cs typeface="Arial"/>
       </a:minorFont>
     </a:fontScheme>
     <a:fmtScheme name="Office">
@@ -2834,7 +2522,7 @@
         <a:solidFill>
           <a:schemeClr val="phClr"/>
         </a:solidFill>
-        <a:gradFill rotWithShape="1">
+        <a:gradFill>
           <a:gsLst>
             <a:gs pos="0">
               <a:schemeClr val="phClr">
@@ -2860,7 +2548,7 @@
           </a:gsLst>
           <a:lin ang="5400000" scaled="0"/>
         </a:gradFill>
-        <a:gradFill rotWithShape="1">
+        <a:gradFill>
           <a:gsLst>
             <a:gs pos="0">
               <a:schemeClr val="phClr">
@@ -2937,7 +2625,7 @@
             <a:satMod val="170000"/>
           </a:schemeClr>
         </a:solidFill>
-        <a:gradFill rotWithShape="1">
+        <a:gradFill>
           <a:gsLst>
             <a:gs pos="0">
               <a:schemeClr val="phClr">
@@ -2968,11 +2656,5 @@
     </a:fmtScheme>
   </a:themeElements>
   <a:objectDefaults/>
-  <a:extraClrSchemeLst/>
-  <a:extLst>
-    <a:ext uri="{05A4C25C-085E-4340-85A3-A5531E510DB2}">
-      <thm15:themeFamily xmlns:thm15="http://schemas.microsoft.com/office/thememl/2012/main" name="Office Theme" id="{62F939B6-93AF-4DB8-9C6B-D6C7DFDC589F}" vid="{4A3C46E8-61CC-4603-A589-7422A47A8E4A}"/>
-    </a:ext>
-  </a:extLst>
 </a:theme>
 </file>